--- a/databricks-poc/Utilitics_Platform_Presentation.pptx
+++ b/databricks-poc/Utilitics_Platform_Presentation.pptx
@@ -4823,7 +4823,7 @@
                 </a:solidFill>
                 <a:latin typeface="Calibri"/>
               </a:rPr>
-              <a:t>✔  3 data sources: Time Series, SQL Snapshot, Forecasts</a:t>
+              <a:t>✔  3 source formats: CSV (meters), SQLite DB (assets), Parquet (forecasts)</a:t>
             </a:r>
           </a:p>
         </p:txBody>
@@ -5005,7 +5005,42 @@
       </p:sp>
       <p:sp>
         <p:nvSpPr>
-          <p:cNvPr id="36" name="Rectangle 35"/>
+          <p:cNvPr id="36" name="TextBox 35"/>
+          <p:cNvSpPr txBox="1"/>
+          <p:nvPr/>
+        </p:nvSpPr>
+        <p:spPr>
+          <a:xfrm>
+            <a:off x="457200" y="6007608"/>
+            <a:ext cx="5029200" cy="365760"/>
+          </a:xfrm>
+          <a:prstGeom prst="rect">
+            <a:avLst/>
+          </a:prstGeom>
+          <a:noFill/>
+        </p:spPr>
+        <p:txBody>
+          <a:bodyPr wrap="square">
+            <a:spAutoFit/>
+          </a:bodyPr>
+          <a:lstStyle/>
+          <a:p>
+            <a:pPr algn="l"/>
+            <a:r>
+              <a:rPr sz="1200" b="0" i="0">
+                <a:solidFill>
+                  <a:srgbClr val="2C3E50"/>
+                </a:solidFill>
+                <a:latin typeface="Calibri"/>
+              </a:rPr>
+              <a:t>✔  CI/CD: GitHub Actions + nightly build + WhatsApp alerts</a:t>
+            </a:r>
+          </a:p>
+        </p:txBody>
+      </p:sp>
+      <p:sp>
+        <p:nvSpPr>
+          <p:cNvPr id="37" name="Rectangle 36"/>
           <p:cNvSpPr/>
           <p:nvPr/>
         </p:nvSpPr>
@@ -5048,7 +5083,7 @@
       </p:sp>
       <p:sp>
         <p:nvSpPr>
-          <p:cNvPr id="37" name="Rectangle 36"/>
+          <p:cNvPr id="38" name="Rectangle 37"/>
           <p:cNvSpPr/>
           <p:nvPr/>
         </p:nvSpPr>
@@ -5091,7 +5126,7 @@
       </p:sp>
       <p:sp>
         <p:nvSpPr>
-          <p:cNvPr id="38" name="TextBox 37"/>
+          <p:cNvPr id="39" name="TextBox 38"/>
           <p:cNvSpPr txBox="1"/>
           <p:nvPr/>
         </p:nvSpPr>
@@ -5126,7 +5161,7 @@
       </p:sp>
       <p:sp>
         <p:nvSpPr>
-          <p:cNvPr id="39" name="TextBox 38"/>
+          <p:cNvPr id="40" name="TextBox 39"/>
           <p:cNvSpPr txBox="1"/>
           <p:nvPr/>
         </p:nvSpPr>
@@ -5161,7 +5196,7 @@
       </p:sp>
       <p:sp>
         <p:nvSpPr>
-          <p:cNvPr id="40" name="TextBox 39"/>
+          <p:cNvPr id="41" name="TextBox 40"/>
           <p:cNvSpPr txBox="1"/>
           <p:nvPr/>
         </p:nvSpPr>
@@ -5196,7 +5231,7 @@
       </p:sp>
       <p:sp>
         <p:nvSpPr>
-          <p:cNvPr id="41" name="TextBox 40"/>
+          <p:cNvPr id="42" name="TextBox 41"/>
           <p:cNvSpPr txBox="1"/>
           <p:nvPr/>
         </p:nvSpPr>
@@ -5231,7 +5266,7 @@
       </p:sp>
       <p:sp>
         <p:nvSpPr>
-          <p:cNvPr id="42" name="TextBox 41"/>
+          <p:cNvPr id="43" name="TextBox 42"/>
           <p:cNvSpPr txBox="1"/>
           <p:nvPr/>
         </p:nvSpPr>
@@ -5266,7 +5301,7 @@
       </p:sp>
       <p:sp>
         <p:nvSpPr>
-          <p:cNvPr id="43" name="TextBox 42"/>
+          <p:cNvPr id="44" name="TextBox 43"/>
           <p:cNvSpPr txBox="1"/>
           <p:nvPr/>
         </p:nvSpPr>
@@ -5301,7 +5336,7 @@
       </p:sp>
       <p:sp>
         <p:nvSpPr>
-          <p:cNvPr id="44" name="TextBox 43"/>
+          <p:cNvPr id="45" name="TextBox 44"/>
           <p:cNvSpPr txBox="1"/>
           <p:nvPr/>
         </p:nvSpPr>
@@ -5336,7 +5371,7 @@
       </p:sp>
       <p:sp>
         <p:nvSpPr>
-          <p:cNvPr id="45" name="TextBox 44"/>
+          <p:cNvPr id="46" name="TextBox 45"/>
           <p:cNvSpPr txBox="1"/>
           <p:nvPr/>
         </p:nvSpPr>
@@ -5371,7 +5406,7 @@
       </p:sp>
       <p:sp>
         <p:nvSpPr>
-          <p:cNvPr id="46" name="TextBox 45"/>
+          <p:cNvPr id="47" name="TextBox 46"/>
           <p:cNvSpPr txBox="1"/>
           <p:nvPr/>
         </p:nvSpPr>
@@ -5406,7 +5441,7 @@
       </p:sp>
       <p:sp>
         <p:nvSpPr>
-          <p:cNvPr id="47" name="TextBox 46"/>
+          <p:cNvPr id="48" name="TextBox 47"/>
           <p:cNvSpPr txBox="1"/>
           <p:nvPr/>
         </p:nvSpPr>
@@ -5441,7 +5476,7 @@
       </p:sp>
       <p:sp>
         <p:nvSpPr>
-          <p:cNvPr id="48" name="TextBox 47"/>
+          <p:cNvPr id="49" name="TextBox 48"/>
           <p:cNvSpPr txBox="1"/>
           <p:nvPr/>
         </p:nvSpPr>
@@ -5476,7 +5511,7 @@
       </p:sp>
       <p:sp>
         <p:nvSpPr>
-          <p:cNvPr id="49" name="TextBox 48"/>
+          <p:cNvPr id="50" name="TextBox 49"/>
           <p:cNvSpPr txBox="1"/>
           <p:nvPr/>
         </p:nvSpPr>
@@ -5511,7 +5546,7 @@
       </p:sp>
       <p:sp>
         <p:nvSpPr>
-          <p:cNvPr id="50" name="TextBox 49"/>
+          <p:cNvPr id="51" name="TextBox 50"/>
           <p:cNvSpPr txBox="1"/>
           <p:nvPr/>
         </p:nvSpPr>
@@ -7369,7 +7404,7 @@
             <a:avLst/>
           </a:prstGeom>
           <a:solidFill>
-            <a:srgbClr val="E67E22"/>
+            <a:srgbClr val="1ABC9C"/>
           </a:solidFill>
           <a:ln>
             <a:noFill/>
@@ -7427,7 +7462,7 @@
                 </a:solidFill>
                 <a:latin typeface="Calibri"/>
               </a:rPr>
-              <a:t>○</a:t>
+              <a:t>✔</a:t>
             </a:r>
           </a:p>
         </p:txBody>
@@ -7458,11 +7493,11 @@
             <a:r>
               <a:rPr sz="1200" b="1" i="0">
                 <a:solidFill>
-                  <a:srgbClr val="E67E22"/>
-                </a:solidFill>
-                <a:latin typeface="Calibri"/>
-              </a:rPr>
-              <a:t>Pipeline Run on Azure</a:t>
+                  <a:srgbClr val="2C3E50"/>
+                </a:solidFill>
+                <a:latin typeface="Calibri"/>
+              </a:rPr>
+              <a:t>CI/CD Implemented</a:t>
             </a:r>
           </a:p>
         </p:txBody>
@@ -7497,7 +7532,7 @@
                 </a:solidFill>
                 <a:latin typeface="Calibri"/>
               </a:rPr>
-              <a:t>01_generate_data → 05_validate — NEXT STEP</a:t>
+              <a:t>GitHub Actions CI + CD + nightly build + WhatsApp alerts</a:t>
             </a:r>
           </a:p>
         </p:txBody>
@@ -7610,7 +7645,7 @@
                 </a:solidFill>
                 <a:latin typeface="Calibri"/>
               </a:rPr>
-              <a:t>Tables in Unity Catalog</a:t>
+              <a:t>Pipeline Run on Azure</a:t>
             </a:r>
           </a:p>
         </p:txBody>
@@ -7645,7 +7680,7 @@
                 </a:solidFill>
                 <a:latin typeface="Calibri"/>
               </a:rPr>
-              <a:t>Register Delta tables after pipeline run</a:t>
+              <a:t>01_generate_data → 05_validate — NEXT STEP</a:t>
             </a:r>
           </a:p>
         </p:txBody>
@@ -7758,7 +7793,7 @@
                 </a:solidFill>
                 <a:latin typeface="Calibri"/>
               </a:rPr>
-              <a:t>Real Delta Sharing</a:t>
+              <a:t>Tables in Unity Catalog</a:t>
             </a:r>
           </a:p>
         </p:txBody>
@@ -7793,7 +7828,7 @@
                 </a:solidFill>
                 <a:latin typeface="Calibri"/>
               </a:rPr>
-              <a:t>Phase 8 — Unity Catalog sharing setup</a:t>
+              <a:t>Register Delta tables after pipeline run</a:t>
             </a:r>
           </a:p>
         </p:txBody>
@@ -7906,7 +7941,7 @@
                 </a:solidFill>
                 <a:latin typeface="Calibri"/>
               </a:rPr>
-              <a:t>Databricks Workflows</a:t>
+              <a:t>Real Delta Sharing</a:t>
             </a:r>
           </a:p>
         </p:txBody>
@@ -7941,7 +7976,7 @@
                 </a:solidFill>
                 <a:latin typeface="Calibri"/>
               </a:rPr>
-              <a:t>Phase 9 — scheduled pipeline</a:t>
+              <a:t>Phase 8 — Unity Catalog sharing setup</a:t>
             </a:r>
           </a:p>
         </p:txBody>
@@ -8054,6 +8089,154 @@
                 </a:solidFill>
                 <a:latin typeface="Calibri"/>
               </a:rPr>
+              <a:t>Databricks Workflows</a:t>
+            </a:r>
+          </a:p>
+        </p:txBody>
+      </p:sp>
+      <p:sp>
+        <p:nvSpPr>
+          <p:cNvPr id="69" name="TextBox 68"/>
+          <p:cNvSpPr txBox="1"/>
+          <p:nvPr/>
+        </p:nvSpPr>
+        <p:spPr>
+          <a:xfrm>
+            <a:off x="8732520" y="3456432"/>
+            <a:ext cx="2926080" cy="274320"/>
+          </a:xfrm>
+          <a:prstGeom prst="rect">
+            <a:avLst/>
+          </a:prstGeom>
+          <a:noFill/>
+        </p:spPr>
+        <p:txBody>
+          <a:bodyPr wrap="square">
+            <a:spAutoFit/>
+          </a:bodyPr>
+          <a:lstStyle/>
+          <a:p>
+            <a:pPr algn="l"/>
+            <a:r>
+              <a:rPr sz="1000" b="0" i="0">
+                <a:solidFill>
+                  <a:srgbClr val="7F8C8D"/>
+                </a:solidFill>
+                <a:latin typeface="Calibri"/>
+              </a:rPr>
+              <a:t>Phase 9 — scheduled pipeline</a:t>
+            </a:r>
+          </a:p>
+        </p:txBody>
+      </p:sp>
+      <p:sp>
+        <p:nvSpPr>
+          <p:cNvPr id="70" name="Rectangle 69"/>
+          <p:cNvSpPr/>
+          <p:nvPr/>
+        </p:nvSpPr>
+        <p:spPr>
+          <a:xfrm>
+            <a:off x="6400800" y="3781044"/>
+            <a:ext cx="292608" cy="274320"/>
+          </a:xfrm>
+          <a:prstGeom prst="rect">
+            <a:avLst/>
+          </a:prstGeom>
+          <a:solidFill>
+            <a:srgbClr val="E67E22"/>
+          </a:solidFill>
+          <a:ln>
+            <a:noFill/>
+          </a:ln>
+        </p:spPr>
+        <p:style>
+          <a:lnRef idx="1">
+            <a:schemeClr val="accent1"/>
+          </a:lnRef>
+          <a:fillRef idx="3">
+            <a:schemeClr val="accent1"/>
+          </a:fillRef>
+          <a:effectRef idx="2">
+            <a:schemeClr val="accent1"/>
+          </a:effectRef>
+          <a:fontRef idx="minor">
+            <a:schemeClr val="lt1"/>
+          </a:fontRef>
+        </p:style>
+        <p:txBody>
+          <a:bodyPr rtlCol="0" anchor="ctr"/>
+          <a:lstStyle/>
+          <a:p>
+            <a:pPr algn="ctr"/>
+          </a:p>
+        </p:txBody>
+      </p:sp>
+      <p:sp>
+        <p:nvSpPr>
+          <p:cNvPr id="71" name="TextBox 70"/>
+          <p:cNvSpPr txBox="1"/>
+          <p:nvPr/>
+        </p:nvSpPr>
+        <p:spPr>
+          <a:xfrm>
+            <a:off x="6400800" y="3781044"/>
+            <a:ext cx="292608" cy="274320"/>
+          </a:xfrm>
+          <a:prstGeom prst="rect">
+            <a:avLst/>
+          </a:prstGeom>
+          <a:noFill/>
+        </p:spPr>
+        <p:txBody>
+          <a:bodyPr wrap="square">
+            <a:spAutoFit/>
+          </a:bodyPr>
+          <a:lstStyle/>
+          <a:p>
+            <a:pPr algn="ctr"/>
+            <a:r>
+              <a:rPr sz="1100" b="1" i="0">
+                <a:solidFill>
+                  <a:srgbClr val="FFFFFF"/>
+                </a:solidFill>
+                <a:latin typeface="Calibri"/>
+              </a:rPr>
+              <a:t>○</a:t>
+            </a:r>
+          </a:p>
+        </p:txBody>
+      </p:sp>
+      <p:sp>
+        <p:nvSpPr>
+          <p:cNvPr id="72" name="TextBox 71"/>
+          <p:cNvSpPr txBox="1"/>
+          <p:nvPr/>
+        </p:nvSpPr>
+        <p:spPr>
+          <a:xfrm>
+            <a:off x="6748272" y="3781044"/>
+            <a:ext cx="1920240" cy="274320"/>
+          </a:xfrm>
+          <a:prstGeom prst="rect">
+            <a:avLst/>
+          </a:prstGeom>
+          <a:noFill/>
+        </p:spPr>
+        <p:txBody>
+          <a:bodyPr wrap="square">
+            <a:spAutoFit/>
+          </a:bodyPr>
+          <a:lstStyle/>
+          <a:p>
+            <a:pPr algn="l"/>
+            <a:r>
+              <a:rPr sz="1200" b="1" i="0">
+                <a:solidFill>
+                  <a:srgbClr val="E67E22"/>
+                </a:solidFill>
+                <a:latin typeface="Calibri"/>
+              </a:rPr>
               <a:t>Azure Functions ChatOps</a:t>
             </a:r>
           </a:p>
@@ -8061,13 +8244,13 @@
       </p:sp>
       <p:sp>
         <p:nvSpPr>
-          <p:cNvPr id="69" name="TextBox 68"/>
-          <p:cNvSpPr txBox="1"/>
-          <p:nvPr/>
-        </p:nvSpPr>
-        <p:spPr>
-          <a:xfrm>
-            <a:off x="8732520" y="3456432"/>
+          <p:cNvPr id="73" name="TextBox 72"/>
+          <p:cNvSpPr txBox="1"/>
+          <p:nvPr/>
+        </p:nvSpPr>
+        <p:spPr>
+          <a:xfrm>
+            <a:off x="8732520" y="3781044"/>
             <a:ext cx="2926080" cy="274320"/>
           </a:xfrm>
           <a:prstGeom prst="rect">
@@ -9215,7 +9398,7 @@
                 </a:solidFill>
                 <a:latin typeface="Calibri"/>
               </a:rPr>
-              <a:t>Time series (Parquet) + SQL database (SQLite→Azure SQL) + files — realistic real-world setup.</a:t>
+              <a:t>CSV (meter readings) + SQLite DB (assets) + Parquet (forecasts) — 3 real-world source formats ingested in one pipeline.</a:t>
             </a:r>
           </a:p>
         </p:txBody>
@@ -9578,7 +9761,7 @@
                 </a:solidFill>
                 <a:latin typeface="Calibri"/>
               </a:rPr>
-              <a:t>Full Documentation</a:t>
+              <a:t>CI/CD + Documentation</a:t>
             </a:r>
           </a:p>
         </p:txBody>
@@ -9613,7 +9796,7 @@
                 </a:solidFill>
                 <a:latin typeface="Calibri"/>
               </a:rPr>
-              <a:t>Word guide, PowerPoint, interactive HTML flow diagram, conversation log — all auto-generated.</a:t>
+              <a:t>GitHub Actions CI (syntax &amp; secrets) + CD (auto-deploy) + nightly build + WhatsApp alerts. Full docs auto-generated.</a:t>
             </a:r>
           </a:p>
         </p:txBody>
@@ -10333,7 +10516,7 @@
                 </a:solidFill>
                 <a:latin typeface="Calibri"/>
               </a:rPr>
-              <a:t>Register all Delta tables in data_sharing_poc catalog</a:t>
+              <a:t>Register Delta tables — CI/CD + nightly build already live</a:t>
             </a:r>
           </a:p>
         </p:txBody>
@@ -13864,7 +14047,7 @@
                 </a:solidFill>
                 <a:latin typeface="Calibri"/>
               </a:rPr>
-              <a:t>6</a:t>
+              <a:t>7</a:t>
             </a:r>
           </a:p>
         </p:txBody>
@@ -14382,8 +14565,51 @@
         </p:nvSpPr>
         <p:spPr>
           <a:xfrm>
-            <a:off x="365760" y="1463040"/>
-            <a:ext cx="384048" cy="347472"/>
+            <a:off x="274320" y="1417320"/>
+            <a:ext cx="3657600" cy="658368"/>
+          </a:xfrm>
+          <a:prstGeom prst="rect">
+            <a:avLst/>
+          </a:prstGeom>
+          <a:solidFill>
+            <a:srgbClr val="FFFFFF"/>
+          </a:solidFill>
+          <a:ln>
+            <a:noFill/>
+          </a:ln>
+        </p:spPr>
+        <p:style>
+          <a:lnRef idx="1">
+            <a:schemeClr val="accent1"/>
+          </a:lnRef>
+          <a:fillRef idx="3">
+            <a:schemeClr val="accent1"/>
+          </a:fillRef>
+          <a:effectRef idx="2">
+            <a:schemeClr val="accent1"/>
+          </a:effectRef>
+          <a:fontRef idx="minor">
+            <a:schemeClr val="lt1"/>
+          </a:fontRef>
+        </p:style>
+        <p:txBody>
+          <a:bodyPr rtlCol="0" anchor="ctr"/>
+          <a:lstStyle/>
+          <a:p>
+            <a:pPr algn="ctr"/>
+          </a:p>
+        </p:txBody>
+      </p:sp>
+      <p:sp>
+        <p:nvSpPr>
+          <p:cNvPr id="11" name="Rectangle 10"/>
+          <p:cNvSpPr/>
+          <p:nvPr/>
+        </p:nvSpPr>
+        <p:spPr>
+          <a:xfrm>
+            <a:off x="274320" y="1417320"/>
+            <a:ext cx="50800" cy="658368"/>
           </a:xfrm>
           <a:prstGeom prst="rect">
             <a:avLst/>
@@ -14419,119 +14645,14 @@
       </p:sp>
       <p:sp>
         <p:nvSpPr>
-          <p:cNvPr id="11" name="TextBox 10"/>
-          <p:cNvSpPr txBox="1"/>
-          <p:nvPr/>
-        </p:nvSpPr>
-        <p:spPr>
-          <a:xfrm>
-            <a:off x="365760" y="1463040"/>
-            <a:ext cx="384048" cy="347472"/>
-          </a:xfrm>
-          <a:prstGeom prst="rect">
-            <a:avLst/>
-          </a:prstGeom>
-          <a:noFill/>
-        </p:spPr>
-        <p:txBody>
-          <a:bodyPr wrap="square">
-            <a:spAutoFit/>
-          </a:bodyPr>
-          <a:lstStyle/>
-          <a:p>
-            <a:pPr algn="ctr"/>
-            <a:r>
-              <a:rPr sz="1200" b="1" i="0">
-                <a:solidFill>
-                  <a:srgbClr val="0D1B2A"/>
-                </a:solidFill>
-                <a:latin typeface="Calibri"/>
-              </a:rPr>
-              <a:t>01</a:t>
-            </a:r>
-          </a:p>
-        </p:txBody>
-      </p:sp>
-      <p:sp>
-        <p:nvSpPr>
-          <p:cNvPr id="12" name="TextBox 11"/>
-          <p:cNvSpPr txBox="1"/>
-          <p:nvPr/>
-        </p:nvSpPr>
-        <p:spPr>
-          <a:xfrm>
-            <a:off x="822960" y="1463040"/>
-            <a:ext cx="2560320" cy="347472"/>
-          </a:xfrm>
-          <a:prstGeom prst="rect">
-            <a:avLst/>
-          </a:prstGeom>
-          <a:noFill/>
-        </p:spPr>
-        <p:txBody>
-          <a:bodyPr wrap="square">
-            <a:spAutoFit/>
-          </a:bodyPr>
-          <a:lstStyle/>
-          <a:p>
-            <a:pPr algn="l"/>
-            <a:r>
-              <a:rPr sz="1400" b="1" i="0">
-                <a:solidFill>
-                  <a:srgbClr val="2C3E50"/>
-                </a:solidFill>
-                <a:latin typeface="Calibri"/>
-              </a:rPr>
-              <a:t>Business Requirement</a:t>
-            </a:r>
-          </a:p>
-        </p:txBody>
-      </p:sp>
-      <p:sp>
-        <p:nvSpPr>
-          <p:cNvPr id="13" name="TextBox 12"/>
-          <p:cNvSpPr txBox="1"/>
-          <p:nvPr/>
-        </p:nvSpPr>
-        <p:spPr>
-          <a:xfrm>
-            <a:off x="822960" y="1664208"/>
-            <a:ext cx="2560320" cy="256032"/>
-          </a:xfrm>
-          <a:prstGeom prst="rect">
-            <a:avLst/>
-          </a:prstGeom>
-          <a:noFill/>
-        </p:spPr>
-        <p:txBody>
-          <a:bodyPr wrap="square">
-            <a:spAutoFit/>
-          </a:bodyPr>
-          <a:lstStyle/>
-          <a:p>
-            <a:pPr algn="l"/>
-            <a:r>
-              <a:rPr sz="1000" b="0" i="0">
-                <a:solidFill>
-                  <a:srgbClr val="7F8C8D"/>
-                </a:solidFill>
-                <a:latin typeface="Calibri"/>
-              </a:rPr>
-              <a:t>What was asked of us</a:t>
-            </a:r>
-          </a:p>
-        </p:txBody>
-      </p:sp>
-      <p:sp>
-        <p:nvSpPr>
-          <p:cNvPr id="14" name="Rectangle 13"/>
+          <p:cNvPr id="12" name="Rectangle 11"/>
           <p:cNvSpPr/>
           <p:nvPr/>
         </p:nvSpPr>
         <p:spPr>
           <a:xfrm>
-            <a:off x="365760" y="1938528"/>
-            <a:ext cx="384048" cy="347472"/>
+            <a:off x="347472" y="1563624"/>
+            <a:ext cx="347472" cy="347472"/>
           </a:xfrm>
           <a:prstGeom prst="rect">
             <a:avLst/>
@@ -14567,119 +14688,162 @@
       </p:sp>
       <p:sp>
         <p:nvSpPr>
+          <p:cNvPr id="13" name="TextBox 12"/>
+          <p:cNvSpPr txBox="1"/>
+          <p:nvPr/>
+        </p:nvSpPr>
+        <p:spPr>
+          <a:xfrm>
+            <a:off x="347472" y="1563624"/>
+            <a:ext cx="347472" cy="347472"/>
+          </a:xfrm>
+          <a:prstGeom prst="rect">
+            <a:avLst/>
+          </a:prstGeom>
+          <a:noFill/>
+        </p:spPr>
+        <p:txBody>
+          <a:bodyPr wrap="square">
+            <a:spAutoFit/>
+          </a:bodyPr>
+          <a:lstStyle/>
+          <a:p>
+            <a:pPr algn="ctr"/>
+            <a:r>
+              <a:rPr sz="1100" b="1" i="0">
+                <a:solidFill>
+                  <a:srgbClr val="0D1B2A"/>
+                </a:solidFill>
+                <a:latin typeface="Calibri"/>
+              </a:rPr>
+              <a:t>01</a:t>
+            </a:r>
+          </a:p>
+        </p:txBody>
+      </p:sp>
+      <p:sp>
+        <p:nvSpPr>
+          <p:cNvPr id="14" name="TextBox 13"/>
+          <p:cNvSpPr txBox="1"/>
+          <p:nvPr/>
+        </p:nvSpPr>
+        <p:spPr>
+          <a:xfrm>
+            <a:off x="777240" y="1508760"/>
+            <a:ext cx="3063240" cy="320040"/>
+          </a:xfrm>
+          <a:prstGeom prst="rect">
+            <a:avLst/>
+          </a:prstGeom>
+          <a:noFill/>
+        </p:spPr>
+        <p:txBody>
+          <a:bodyPr wrap="square">
+            <a:spAutoFit/>
+          </a:bodyPr>
+          <a:lstStyle/>
+          <a:p>
+            <a:pPr algn="l"/>
+            <a:r>
+              <a:rPr sz="1300" b="1" i="0">
+                <a:solidFill>
+                  <a:srgbClr val="2C3E50"/>
+                </a:solidFill>
+                <a:latin typeface="Calibri"/>
+              </a:rPr>
+              <a:t>Business Requirement</a:t>
+            </a:r>
+          </a:p>
+        </p:txBody>
+      </p:sp>
+      <p:sp>
+        <p:nvSpPr>
           <p:cNvPr id="15" name="TextBox 14"/>
           <p:cNvSpPr txBox="1"/>
           <p:nvPr/>
         </p:nvSpPr>
         <p:spPr>
           <a:xfrm>
-            <a:off x="365760" y="1938528"/>
-            <a:ext cx="384048" cy="347472"/>
-          </a:xfrm>
-          <a:prstGeom prst="rect">
-            <a:avLst/>
-          </a:prstGeom>
-          <a:noFill/>
-        </p:spPr>
-        <p:txBody>
-          <a:bodyPr wrap="square">
-            <a:spAutoFit/>
-          </a:bodyPr>
-          <a:lstStyle/>
-          <a:p>
-            <a:pPr algn="ctr"/>
-            <a:r>
-              <a:rPr sz="1200" b="1" i="0">
-                <a:solidFill>
-                  <a:srgbClr val="0D1B2A"/>
-                </a:solidFill>
-                <a:latin typeface="Calibri"/>
-              </a:rPr>
-              <a:t>02</a:t>
-            </a:r>
-          </a:p>
-        </p:txBody>
-      </p:sp>
-      <p:sp>
-        <p:nvSpPr>
-          <p:cNvPr id="16" name="TextBox 15"/>
-          <p:cNvSpPr txBox="1"/>
-          <p:nvPr/>
-        </p:nvSpPr>
-        <p:spPr>
-          <a:xfrm>
-            <a:off x="822960" y="1938528"/>
-            <a:ext cx="2560320" cy="347472"/>
-          </a:xfrm>
-          <a:prstGeom prst="rect">
-            <a:avLst/>
-          </a:prstGeom>
-          <a:noFill/>
-        </p:spPr>
-        <p:txBody>
-          <a:bodyPr wrap="square">
-            <a:spAutoFit/>
-          </a:bodyPr>
-          <a:lstStyle/>
-          <a:p>
-            <a:pPr algn="l"/>
-            <a:r>
-              <a:rPr sz="1400" b="1" i="0">
-                <a:solidFill>
-                  <a:srgbClr val="2C3E50"/>
-                </a:solidFill>
-                <a:latin typeface="Calibri"/>
-              </a:rPr>
-              <a:t>Our Approach</a:t>
-            </a:r>
-          </a:p>
-        </p:txBody>
-      </p:sp>
-      <p:sp>
-        <p:nvSpPr>
-          <p:cNvPr id="17" name="TextBox 16"/>
-          <p:cNvSpPr txBox="1"/>
-          <p:nvPr/>
-        </p:nvSpPr>
-        <p:spPr>
-          <a:xfrm>
-            <a:off x="822960" y="2139696"/>
-            <a:ext cx="2560320" cy="256032"/>
-          </a:xfrm>
-          <a:prstGeom prst="rect">
-            <a:avLst/>
-          </a:prstGeom>
-          <a:noFill/>
-        </p:spPr>
-        <p:txBody>
-          <a:bodyPr wrap="square">
-            <a:spAutoFit/>
-          </a:bodyPr>
-          <a:lstStyle/>
-          <a:p>
-            <a:pPr algn="l"/>
-            <a:r>
-              <a:rPr sz="1000" b="0" i="0">
+            <a:off x="777240" y="1801368"/>
+            <a:ext cx="3063240" cy="237744"/>
+          </a:xfrm>
+          <a:prstGeom prst="rect">
+            <a:avLst/>
+          </a:prstGeom>
+          <a:noFill/>
+        </p:spPr>
+        <p:txBody>
+          <a:bodyPr wrap="square">
+            <a:spAutoFit/>
+          </a:bodyPr>
+          <a:lstStyle/>
+          <a:p>
+            <a:pPr algn="l"/>
+            <a:r>
+              <a:rPr sz="1000" b="0" i="1">
                 <a:solidFill>
                   <a:srgbClr val="7F8C8D"/>
                 </a:solidFill>
                 <a:latin typeface="Calibri"/>
               </a:rPr>
-              <a:t>Why local first, then Azure</a:t>
-            </a:r>
-          </a:p>
-        </p:txBody>
-      </p:sp>
-      <p:sp>
-        <p:nvSpPr>
-          <p:cNvPr id="18" name="Rectangle 17"/>
+              <a:t>What was asked of us</a:t>
+            </a:r>
+          </a:p>
+        </p:txBody>
+      </p:sp>
+      <p:sp>
+        <p:nvSpPr>
+          <p:cNvPr id="16" name="Rectangle 15"/>
           <p:cNvSpPr/>
           <p:nvPr/>
         </p:nvSpPr>
         <p:spPr>
           <a:xfrm>
-            <a:off x="365760" y="2414016"/>
-            <a:ext cx="384048" cy="347472"/>
+            <a:off x="274320" y="2130552"/>
+            <a:ext cx="3657600" cy="658368"/>
+          </a:xfrm>
+          <a:prstGeom prst="rect">
+            <a:avLst/>
+          </a:prstGeom>
+          <a:solidFill>
+            <a:srgbClr val="FFFFFF"/>
+          </a:solidFill>
+          <a:ln>
+            <a:noFill/>
+          </a:ln>
+        </p:spPr>
+        <p:style>
+          <a:lnRef idx="1">
+            <a:schemeClr val="accent1"/>
+          </a:lnRef>
+          <a:fillRef idx="3">
+            <a:schemeClr val="accent1"/>
+          </a:fillRef>
+          <a:effectRef idx="2">
+            <a:schemeClr val="accent1"/>
+          </a:effectRef>
+          <a:fontRef idx="minor">
+            <a:schemeClr val="lt1"/>
+          </a:fontRef>
+        </p:style>
+        <p:txBody>
+          <a:bodyPr rtlCol="0" anchor="ctr"/>
+          <a:lstStyle/>
+          <a:p>
+            <a:pPr algn="ctr"/>
+          </a:p>
+        </p:txBody>
+      </p:sp>
+      <p:sp>
+        <p:nvSpPr>
+          <p:cNvPr id="17" name="Rectangle 16"/>
+          <p:cNvSpPr/>
+          <p:nvPr/>
+        </p:nvSpPr>
+        <p:spPr>
+          <a:xfrm>
+            <a:off x="274320" y="2130552"/>
+            <a:ext cx="50800" cy="658368"/>
           </a:xfrm>
           <a:prstGeom prst="rect">
             <a:avLst/>
@@ -14715,119 +14879,14 @@
       </p:sp>
       <p:sp>
         <p:nvSpPr>
-          <p:cNvPr id="19" name="TextBox 18"/>
-          <p:cNvSpPr txBox="1"/>
-          <p:nvPr/>
-        </p:nvSpPr>
-        <p:spPr>
-          <a:xfrm>
-            <a:off x="365760" y="2414016"/>
-            <a:ext cx="384048" cy="347472"/>
-          </a:xfrm>
-          <a:prstGeom prst="rect">
-            <a:avLst/>
-          </a:prstGeom>
-          <a:noFill/>
-        </p:spPr>
-        <p:txBody>
-          <a:bodyPr wrap="square">
-            <a:spAutoFit/>
-          </a:bodyPr>
-          <a:lstStyle/>
-          <a:p>
-            <a:pPr algn="ctr"/>
-            <a:r>
-              <a:rPr sz="1200" b="1" i="0">
-                <a:solidFill>
-                  <a:srgbClr val="0D1B2A"/>
-                </a:solidFill>
-                <a:latin typeface="Calibri"/>
-              </a:rPr>
-              <a:t>03</a:t>
-            </a:r>
-          </a:p>
-        </p:txBody>
-      </p:sp>
-      <p:sp>
-        <p:nvSpPr>
-          <p:cNvPr id="20" name="TextBox 19"/>
-          <p:cNvSpPr txBox="1"/>
-          <p:nvPr/>
-        </p:nvSpPr>
-        <p:spPr>
-          <a:xfrm>
-            <a:off x="822960" y="2414016"/>
-            <a:ext cx="2560320" cy="347472"/>
-          </a:xfrm>
-          <a:prstGeom prst="rect">
-            <a:avLst/>
-          </a:prstGeom>
-          <a:noFill/>
-        </p:spPr>
-        <p:txBody>
-          <a:bodyPr wrap="square">
-            <a:spAutoFit/>
-          </a:bodyPr>
-          <a:lstStyle/>
-          <a:p>
-            <a:pPr algn="l"/>
-            <a:r>
-              <a:rPr sz="1400" b="1" i="0">
-                <a:solidFill>
-                  <a:srgbClr val="2C3E50"/>
-                </a:solidFill>
-                <a:latin typeface="Calibri"/>
-              </a:rPr>
-              <a:t>What is Databricks?</a:t>
-            </a:r>
-          </a:p>
-        </p:txBody>
-      </p:sp>
-      <p:sp>
-        <p:nvSpPr>
-          <p:cNvPr id="21" name="TextBox 20"/>
-          <p:cNvSpPr txBox="1"/>
-          <p:nvPr/>
-        </p:nvSpPr>
-        <p:spPr>
-          <a:xfrm>
-            <a:off x="822960" y="2615184"/>
-            <a:ext cx="2560320" cy="256032"/>
-          </a:xfrm>
-          <a:prstGeom prst="rect">
-            <a:avLst/>
-          </a:prstGeom>
-          <a:noFill/>
-        </p:spPr>
-        <p:txBody>
-          <a:bodyPr wrap="square">
-            <a:spAutoFit/>
-          </a:bodyPr>
-          <a:lstStyle/>
-          <a:p>
-            <a:pPr algn="l"/>
-            <a:r>
-              <a:rPr sz="1000" b="0" i="0">
-                <a:solidFill>
-                  <a:srgbClr val="7F8C8D"/>
-                </a:solidFill>
-                <a:latin typeface="Calibri"/>
-              </a:rPr>
-              <a:t>Origin, platform overview, simple explanation</a:t>
-            </a:r>
-          </a:p>
-        </p:txBody>
-      </p:sp>
-      <p:sp>
-        <p:nvSpPr>
-          <p:cNvPr id="22" name="Rectangle 21"/>
+          <p:cNvPr id="18" name="Rectangle 17"/>
           <p:cNvSpPr/>
           <p:nvPr/>
         </p:nvSpPr>
         <p:spPr>
           <a:xfrm>
-            <a:off x="365760" y="2889504"/>
-            <a:ext cx="384048" cy="347472"/>
+            <a:off x="347472" y="2276856"/>
+            <a:ext cx="347472" cy="347472"/>
           </a:xfrm>
           <a:prstGeom prst="rect">
             <a:avLst/>
@@ -14863,119 +14922,162 @@
       </p:sp>
       <p:sp>
         <p:nvSpPr>
-          <p:cNvPr id="23" name="TextBox 22"/>
-          <p:cNvSpPr txBox="1"/>
-          <p:nvPr/>
-        </p:nvSpPr>
-        <p:spPr>
-          <a:xfrm>
-            <a:off x="365760" y="2889504"/>
-            <a:ext cx="384048" cy="347472"/>
-          </a:xfrm>
-          <a:prstGeom prst="rect">
-            <a:avLst/>
-          </a:prstGeom>
-          <a:noFill/>
-        </p:spPr>
-        <p:txBody>
-          <a:bodyPr wrap="square">
-            <a:spAutoFit/>
-          </a:bodyPr>
-          <a:lstStyle/>
-          <a:p>
-            <a:pPr algn="ctr"/>
-            <a:r>
-              <a:rPr sz="1200" b="1" i="0">
+          <p:cNvPr id="19" name="TextBox 18"/>
+          <p:cNvSpPr txBox="1"/>
+          <p:nvPr/>
+        </p:nvSpPr>
+        <p:spPr>
+          <a:xfrm>
+            <a:off x="347472" y="2276856"/>
+            <a:ext cx="347472" cy="347472"/>
+          </a:xfrm>
+          <a:prstGeom prst="rect">
+            <a:avLst/>
+          </a:prstGeom>
+          <a:noFill/>
+        </p:spPr>
+        <p:txBody>
+          <a:bodyPr wrap="square">
+            <a:spAutoFit/>
+          </a:bodyPr>
+          <a:lstStyle/>
+          <a:p>
+            <a:pPr algn="ctr"/>
+            <a:r>
+              <a:rPr sz="1100" b="1" i="0">
                 <a:solidFill>
                   <a:srgbClr val="0D1B2A"/>
                 </a:solidFill>
                 <a:latin typeface="Calibri"/>
               </a:rPr>
-              <a:t>04</a:t>
-            </a:r>
-          </a:p>
-        </p:txBody>
-      </p:sp>
-      <p:sp>
-        <p:nvSpPr>
-          <p:cNvPr id="24" name="TextBox 23"/>
-          <p:cNvSpPr txBox="1"/>
-          <p:nvPr/>
-        </p:nvSpPr>
-        <p:spPr>
-          <a:xfrm>
-            <a:off x="822960" y="2889504"/>
-            <a:ext cx="2560320" cy="347472"/>
-          </a:xfrm>
-          <a:prstGeom prst="rect">
-            <a:avLst/>
-          </a:prstGeom>
-          <a:noFill/>
-        </p:spPr>
-        <p:txBody>
-          <a:bodyPr wrap="square">
-            <a:spAutoFit/>
-          </a:bodyPr>
-          <a:lstStyle/>
-          <a:p>
-            <a:pPr algn="l"/>
-            <a:r>
-              <a:rPr sz="1400" b="1" i="0">
+              <a:t>02</a:t>
+            </a:r>
+          </a:p>
+        </p:txBody>
+      </p:sp>
+      <p:sp>
+        <p:nvSpPr>
+          <p:cNvPr id="20" name="TextBox 19"/>
+          <p:cNvSpPr txBox="1"/>
+          <p:nvPr/>
+        </p:nvSpPr>
+        <p:spPr>
+          <a:xfrm>
+            <a:off x="777240" y="2221992"/>
+            <a:ext cx="3063240" cy="320040"/>
+          </a:xfrm>
+          <a:prstGeom prst="rect">
+            <a:avLst/>
+          </a:prstGeom>
+          <a:noFill/>
+        </p:spPr>
+        <p:txBody>
+          <a:bodyPr wrap="square">
+            <a:spAutoFit/>
+          </a:bodyPr>
+          <a:lstStyle/>
+          <a:p>
+            <a:pPr algn="l"/>
+            <a:r>
+              <a:rPr sz="1300" b="1" i="0">
                 <a:solidFill>
                   <a:srgbClr val="2C3E50"/>
                 </a:solidFill>
                 <a:latin typeface="Calibri"/>
               </a:rPr>
-              <a:t>Databricks Key Features</a:t>
-            </a:r>
-          </a:p>
-        </p:txBody>
-      </p:sp>
-      <p:sp>
-        <p:nvSpPr>
-          <p:cNvPr id="25" name="TextBox 24"/>
-          <p:cNvSpPr txBox="1"/>
-          <p:nvPr/>
-        </p:nvSpPr>
-        <p:spPr>
-          <a:xfrm>
-            <a:off x="822960" y="3090672"/>
-            <a:ext cx="2560320" cy="256032"/>
-          </a:xfrm>
-          <a:prstGeom prst="rect">
-            <a:avLst/>
-          </a:prstGeom>
-          <a:noFill/>
-        </p:spPr>
-        <p:txBody>
-          <a:bodyPr wrap="square">
-            <a:spAutoFit/>
-          </a:bodyPr>
-          <a:lstStyle/>
-          <a:p>
-            <a:pPr algn="l"/>
-            <a:r>
-              <a:rPr sz="1000" b="0" i="0">
+              <a:t>Our Approach</a:t>
+            </a:r>
+          </a:p>
+        </p:txBody>
+      </p:sp>
+      <p:sp>
+        <p:nvSpPr>
+          <p:cNvPr id="21" name="TextBox 20"/>
+          <p:cNvSpPr txBox="1"/>
+          <p:nvPr/>
+        </p:nvSpPr>
+        <p:spPr>
+          <a:xfrm>
+            <a:off x="777240" y="2514600"/>
+            <a:ext cx="3063240" cy="237744"/>
+          </a:xfrm>
+          <a:prstGeom prst="rect">
+            <a:avLst/>
+          </a:prstGeom>
+          <a:noFill/>
+        </p:spPr>
+        <p:txBody>
+          <a:bodyPr wrap="square">
+            <a:spAutoFit/>
+          </a:bodyPr>
+          <a:lstStyle/>
+          <a:p>
+            <a:pPr algn="l"/>
+            <a:r>
+              <a:rPr sz="1000" b="0" i="1">
                 <a:solidFill>
                   <a:srgbClr val="7F8C8D"/>
                 </a:solidFill>
                 <a:latin typeface="Calibri"/>
               </a:rPr>
-              <a:t>Delta Lake, Unity Catalog, Medallion, Sharing</a:t>
-            </a:r>
-          </a:p>
-        </p:txBody>
-      </p:sp>
-      <p:sp>
-        <p:nvSpPr>
-          <p:cNvPr id="26" name="Rectangle 25"/>
+              <a:t>Local first, then Azure</a:t>
+            </a:r>
+          </a:p>
+        </p:txBody>
+      </p:sp>
+      <p:sp>
+        <p:nvSpPr>
+          <p:cNvPr id="22" name="Rectangle 21"/>
           <p:cNvSpPr/>
           <p:nvPr/>
         </p:nvSpPr>
         <p:spPr>
           <a:xfrm>
-            <a:off x="365760" y="3364992"/>
-            <a:ext cx="384048" cy="347472"/>
+            <a:off x="274320" y="2843784"/>
+            <a:ext cx="3657600" cy="658368"/>
+          </a:xfrm>
+          <a:prstGeom prst="rect">
+            <a:avLst/>
+          </a:prstGeom>
+          <a:solidFill>
+            <a:srgbClr val="FFFFFF"/>
+          </a:solidFill>
+          <a:ln>
+            <a:noFill/>
+          </a:ln>
+        </p:spPr>
+        <p:style>
+          <a:lnRef idx="1">
+            <a:schemeClr val="accent1"/>
+          </a:lnRef>
+          <a:fillRef idx="3">
+            <a:schemeClr val="accent1"/>
+          </a:fillRef>
+          <a:effectRef idx="2">
+            <a:schemeClr val="accent1"/>
+          </a:effectRef>
+          <a:fontRef idx="minor">
+            <a:schemeClr val="lt1"/>
+          </a:fontRef>
+        </p:style>
+        <p:txBody>
+          <a:bodyPr rtlCol="0" anchor="ctr"/>
+          <a:lstStyle/>
+          <a:p>
+            <a:pPr algn="ctr"/>
+          </a:p>
+        </p:txBody>
+      </p:sp>
+      <p:sp>
+        <p:nvSpPr>
+          <p:cNvPr id="23" name="Rectangle 22"/>
+          <p:cNvSpPr/>
+          <p:nvPr/>
+        </p:nvSpPr>
+        <p:spPr>
+          <a:xfrm>
+            <a:off x="274320" y="2843784"/>
+            <a:ext cx="50800" cy="658368"/>
           </a:xfrm>
           <a:prstGeom prst="rect">
             <a:avLst/>
@@ -15011,119 +15113,14 @@
       </p:sp>
       <p:sp>
         <p:nvSpPr>
-          <p:cNvPr id="27" name="TextBox 26"/>
-          <p:cNvSpPr txBox="1"/>
-          <p:nvPr/>
-        </p:nvSpPr>
-        <p:spPr>
-          <a:xfrm>
-            <a:off x="365760" y="3364992"/>
-            <a:ext cx="384048" cy="347472"/>
-          </a:xfrm>
-          <a:prstGeom prst="rect">
-            <a:avLst/>
-          </a:prstGeom>
-          <a:noFill/>
-        </p:spPr>
-        <p:txBody>
-          <a:bodyPr wrap="square">
-            <a:spAutoFit/>
-          </a:bodyPr>
-          <a:lstStyle/>
-          <a:p>
-            <a:pPr algn="ctr"/>
-            <a:r>
-              <a:rPr sz="1200" b="1" i="0">
-                <a:solidFill>
-                  <a:srgbClr val="0D1B2A"/>
-                </a:solidFill>
-                <a:latin typeface="Calibri"/>
-              </a:rPr>
-              <a:t>05</a:t>
-            </a:r>
-          </a:p>
-        </p:txBody>
-      </p:sp>
-      <p:sp>
-        <p:nvSpPr>
-          <p:cNvPr id="28" name="TextBox 27"/>
-          <p:cNvSpPr txBox="1"/>
-          <p:nvPr/>
-        </p:nvSpPr>
-        <p:spPr>
-          <a:xfrm>
-            <a:off x="822960" y="3364992"/>
-            <a:ext cx="2560320" cy="347472"/>
-          </a:xfrm>
-          <a:prstGeom prst="rect">
-            <a:avLst/>
-          </a:prstGeom>
-          <a:noFill/>
-        </p:spPr>
-        <p:txBody>
-          <a:bodyPr wrap="square">
-            <a:spAutoFit/>
-          </a:bodyPr>
-          <a:lstStyle/>
-          <a:p>
-            <a:pPr algn="l"/>
-            <a:r>
-              <a:rPr sz="1400" b="1" i="0">
-                <a:solidFill>
-                  <a:srgbClr val="2C3E50"/>
-                </a:solidFill>
-                <a:latin typeface="Calibri"/>
-              </a:rPr>
-              <a:t>Why Azure Databricks?</a:t>
-            </a:r>
-          </a:p>
-        </p:txBody>
-      </p:sp>
-      <p:sp>
-        <p:nvSpPr>
-          <p:cNvPr id="29" name="TextBox 28"/>
-          <p:cNvSpPr txBox="1"/>
-          <p:nvPr/>
-        </p:nvSpPr>
-        <p:spPr>
-          <a:xfrm>
-            <a:off x="822960" y="3566160"/>
-            <a:ext cx="2560320" cy="256032"/>
-          </a:xfrm>
-          <a:prstGeom prst="rect">
-            <a:avLst/>
-          </a:prstGeom>
-          <a:noFill/>
-        </p:spPr>
-        <p:txBody>
-          <a:bodyPr wrap="square">
-            <a:spAutoFit/>
-          </a:bodyPr>
-          <a:lstStyle/>
-          <a:p>
-            <a:pPr algn="l"/>
-            <a:r>
-              <a:rPr sz="1000" b="0" i="0">
-                <a:solidFill>
-                  <a:srgbClr val="7F8C8D"/>
-                </a:solidFill>
-                <a:latin typeface="Calibri"/>
-              </a:rPr>
-              <a:t>Azure integration, cost, vs alternatives</a:t>
-            </a:r>
-          </a:p>
-        </p:txBody>
-      </p:sp>
-      <p:sp>
-        <p:nvSpPr>
-          <p:cNvPr id="30" name="Rectangle 29"/>
+          <p:cNvPr id="24" name="Rectangle 23"/>
           <p:cNvSpPr/>
           <p:nvPr/>
         </p:nvSpPr>
         <p:spPr>
           <a:xfrm>
-            <a:off x="6400800" y="1463040"/>
-            <a:ext cx="384048" cy="347472"/>
+            <a:off x="347472" y="2990088"/>
+            <a:ext cx="347472" cy="347472"/>
           </a:xfrm>
           <a:prstGeom prst="rect">
             <a:avLst/>
@@ -15159,119 +15156,162 @@
       </p:sp>
       <p:sp>
         <p:nvSpPr>
-          <p:cNvPr id="31" name="TextBox 30"/>
-          <p:cNvSpPr txBox="1"/>
-          <p:nvPr/>
-        </p:nvSpPr>
-        <p:spPr>
-          <a:xfrm>
-            <a:off x="6400800" y="1463040"/>
-            <a:ext cx="384048" cy="347472"/>
-          </a:xfrm>
-          <a:prstGeom prst="rect">
-            <a:avLst/>
-          </a:prstGeom>
-          <a:noFill/>
-        </p:spPr>
-        <p:txBody>
-          <a:bodyPr wrap="square">
-            <a:spAutoFit/>
-          </a:bodyPr>
-          <a:lstStyle/>
-          <a:p>
-            <a:pPr algn="ctr"/>
-            <a:r>
-              <a:rPr sz="1200" b="1" i="0">
+          <p:cNvPr id="25" name="TextBox 24"/>
+          <p:cNvSpPr txBox="1"/>
+          <p:nvPr/>
+        </p:nvSpPr>
+        <p:spPr>
+          <a:xfrm>
+            <a:off x="347472" y="2990088"/>
+            <a:ext cx="347472" cy="347472"/>
+          </a:xfrm>
+          <a:prstGeom prst="rect">
+            <a:avLst/>
+          </a:prstGeom>
+          <a:noFill/>
+        </p:spPr>
+        <p:txBody>
+          <a:bodyPr wrap="square">
+            <a:spAutoFit/>
+          </a:bodyPr>
+          <a:lstStyle/>
+          <a:p>
+            <a:pPr algn="ctr"/>
+            <a:r>
+              <a:rPr sz="1100" b="1" i="0">
                 <a:solidFill>
                   <a:srgbClr val="0D1B2A"/>
                 </a:solidFill>
                 <a:latin typeface="Calibri"/>
               </a:rPr>
-              <a:t>06</a:t>
-            </a:r>
-          </a:p>
-        </p:txBody>
-      </p:sp>
-      <p:sp>
-        <p:nvSpPr>
-          <p:cNvPr id="32" name="TextBox 31"/>
-          <p:cNvSpPr txBox="1"/>
-          <p:nvPr/>
-        </p:nvSpPr>
-        <p:spPr>
-          <a:xfrm>
-            <a:off x="6858000" y="1463040"/>
-            <a:ext cx="2560320" cy="347472"/>
-          </a:xfrm>
-          <a:prstGeom prst="rect">
-            <a:avLst/>
-          </a:prstGeom>
-          <a:noFill/>
-        </p:spPr>
-        <p:txBody>
-          <a:bodyPr wrap="square">
-            <a:spAutoFit/>
-          </a:bodyPr>
-          <a:lstStyle/>
-          <a:p>
-            <a:pPr algn="l"/>
-            <a:r>
-              <a:rPr sz="1400" b="1" i="0">
+              <a:t>03</a:t>
+            </a:r>
+          </a:p>
+        </p:txBody>
+      </p:sp>
+      <p:sp>
+        <p:nvSpPr>
+          <p:cNvPr id="26" name="TextBox 25"/>
+          <p:cNvSpPr txBox="1"/>
+          <p:nvPr/>
+        </p:nvSpPr>
+        <p:spPr>
+          <a:xfrm>
+            <a:off x="777240" y="2935224"/>
+            <a:ext cx="3063240" cy="320040"/>
+          </a:xfrm>
+          <a:prstGeom prst="rect">
+            <a:avLst/>
+          </a:prstGeom>
+          <a:noFill/>
+        </p:spPr>
+        <p:txBody>
+          <a:bodyPr wrap="square">
+            <a:spAutoFit/>
+          </a:bodyPr>
+          <a:lstStyle/>
+          <a:p>
+            <a:pPr algn="l"/>
+            <a:r>
+              <a:rPr sz="1300" b="1" i="0">
                 <a:solidFill>
                   <a:srgbClr val="2C3E50"/>
                 </a:solidFill>
                 <a:latin typeface="Calibri"/>
               </a:rPr>
-              <a:t>Solution Architecture</a:t>
-            </a:r>
-          </a:p>
-        </p:txBody>
-      </p:sp>
-      <p:sp>
-        <p:nvSpPr>
-          <p:cNvPr id="33" name="TextBox 32"/>
-          <p:cNvSpPr txBox="1"/>
-          <p:nvPr/>
-        </p:nvSpPr>
-        <p:spPr>
-          <a:xfrm>
-            <a:off x="6858000" y="1664208"/>
-            <a:ext cx="2560320" cy="256032"/>
-          </a:xfrm>
-          <a:prstGeom prst="rect">
-            <a:avLst/>
-          </a:prstGeom>
-          <a:noFill/>
-        </p:spPr>
-        <p:txBody>
-          <a:bodyPr wrap="square">
-            <a:spAutoFit/>
-          </a:bodyPr>
-          <a:lstStyle/>
-          <a:p>
-            <a:pPr algn="l"/>
-            <a:r>
-              <a:rPr sz="1000" b="0" i="0">
+              <a:t>What is Databricks?</a:t>
+            </a:r>
+          </a:p>
+        </p:txBody>
+      </p:sp>
+      <p:sp>
+        <p:nvSpPr>
+          <p:cNvPr id="27" name="TextBox 26"/>
+          <p:cNvSpPr txBox="1"/>
+          <p:nvPr/>
+        </p:nvSpPr>
+        <p:spPr>
+          <a:xfrm>
+            <a:off x="777240" y="3227832"/>
+            <a:ext cx="3063240" cy="237744"/>
+          </a:xfrm>
+          <a:prstGeom prst="rect">
+            <a:avLst/>
+          </a:prstGeom>
+          <a:noFill/>
+        </p:spPr>
+        <p:txBody>
+          <a:bodyPr wrap="square">
+            <a:spAutoFit/>
+          </a:bodyPr>
+          <a:lstStyle/>
+          <a:p>
+            <a:pPr algn="l"/>
+            <a:r>
+              <a:rPr sz="1000" b="0" i="1">
                 <a:solidFill>
                   <a:srgbClr val="7F8C8D"/>
                 </a:solidFill>
                 <a:latin typeface="Calibri"/>
               </a:rPr>
-              <a:t>End-to-end platform design</a:t>
-            </a:r>
-          </a:p>
-        </p:txBody>
-      </p:sp>
-      <p:sp>
-        <p:nvSpPr>
-          <p:cNvPr id="34" name="Rectangle 33"/>
+              <a:t>Platform overview</a:t>
+            </a:r>
+          </a:p>
+        </p:txBody>
+      </p:sp>
+      <p:sp>
+        <p:nvSpPr>
+          <p:cNvPr id="28" name="Rectangle 27"/>
           <p:cNvSpPr/>
           <p:nvPr/>
         </p:nvSpPr>
         <p:spPr>
           <a:xfrm>
-            <a:off x="6400800" y="1938528"/>
-            <a:ext cx="384048" cy="347472"/>
+            <a:off x="274320" y="3557016"/>
+            <a:ext cx="3657600" cy="658368"/>
+          </a:xfrm>
+          <a:prstGeom prst="rect">
+            <a:avLst/>
+          </a:prstGeom>
+          <a:solidFill>
+            <a:srgbClr val="FFFFFF"/>
+          </a:solidFill>
+          <a:ln>
+            <a:noFill/>
+          </a:ln>
+        </p:spPr>
+        <p:style>
+          <a:lnRef idx="1">
+            <a:schemeClr val="accent1"/>
+          </a:lnRef>
+          <a:fillRef idx="3">
+            <a:schemeClr val="accent1"/>
+          </a:fillRef>
+          <a:effectRef idx="2">
+            <a:schemeClr val="accent1"/>
+          </a:effectRef>
+          <a:fontRef idx="minor">
+            <a:schemeClr val="lt1"/>
+          </a:fontRef>
+        </p:style>
+        <p:txBody>
+          <a:bodyPr rtlCol="0" anchor="ctr"/>
+          <a:lstStyle/>
+          <a:p>
+            <a:pPr algn="ctr"/>
+          </a:p>
+        </p:txBody>
+      </p:sp>
+      <p:sp>
+        <p:nvSpPr>
+          <p:cNvPr id="29" name="Rectangle 28"/>
+          <p:cNvSpPr/>
+          <p:nvPr/>
+        </p:nvSpPr>
+        <p:spPr>
+          <a:xfrm>
+            <a:off x="274320" y="3557016"/>
+            <a:ext cx="50800" cy="658368"/>
           </a:xfrm>
           <a:prstGeom prst="rect">
             <a:avLst/>
@@ -15307,119 +15347,14 @@
       </p:sp>
       <p:sp>
         <p:nvSpPr>
-          <p:cNvPr id="35" name="TextBox 34"/>
-          <p:cNvSpPr txBox="1"/>
-          <p:nvPr/>
-        </p:nvSpPr>
-        <p:spPr>
-          <a:xfrm>
-            <a:off x="6400800" y="1938528"/>
-            <a:ext cx="384048" cy="347472"/>
-          </a:xfrm>
-          <a:prstGeom prst="rect">
-            <a:avLst/>
-          </a:prstGeom>
-          <a:noFill/>
-        </p:spPr>
-        <p:txBody>
-          <a:bodyPr wrap="square">
-            <a:spAutoFit/>
-          </a:bodyPr>
-          <a:lstStyle/>
-          <a:p>
-            <a:pPr algn="ctr"/>
-            <a:r>
-              <a:rPr sz="1200" b="1" i="0">
-                <a:solidFill>
-                  <a:srgbClr val="0D1B2A"/>
-                </a:solidFill>
-                <a:latin typeface="Calibri"/>
-              </a:rPr>
-              <a:t>07</a:t>
-            </a:r>
-          </a:p>
-        </p:txBody>
-      </p:sp>
-      <p:sp>
-        <p:nvSpPr>
-          <p:cNvPr id="36" name="TextBox 35"/>
-          <p:cNvSpPr txBox="1"/>
-          <p:nvPr/>
-        </p:nvSpPr>
-        <p:spPr>
-          <a:xfrm>
-            <a:off x="6858000" y="1938528"/>
-            <a:ext cx="2560320" cy="347472"/>
-          </a:xfrm>
-          <a:prstGeom prst="rect">
-            <a:avLst/>
-          </a:prstGeom>
-          <a:noFill/>
-        </p:spPr>
-        <p:txBody>
-          <a:bodyPr wrap="square">
-            <a:spAutoFit/>
-          </a:bodyPr>
-          <a:lstStyle/>
-          <a:p>
-            <a:pPr algn="l"/>
-            <a:r>
-              <a:rPr sz="1400" b="1" i="0">
-                <a:solidFill>
-                  <a:srgbClr val="2C3E50"/>
-                </a:solidFill>
-                <a:latin typeface="Calibri"/>
-              </a:rPr>
-              <a:t>Technology Stack</a:t>
-            </a:r>
-          </a:p>
-        </p:txBody>
-      </p:sp>
-      <p:sp>
-        <p:nvSpPr>
-          <p:cNvPr id="37" name="TextBox 36"/>
-          <p:cNvSpPr txBox="1"/>
-          <p:nvPr/>
-        </p:nvSpPr>
-        <p:spPr>
-          <a:xfrm>
-            <a:off x="6858000" y="2139696"/>
-            <a:ext cx="2560320" cy="256032"/>
-          </a:xfrm>
-          <a:prstGeom prst="rect">
-            <a:avLst/>
-          </a:prstGeom>
-          <a:noFill/>
-        </p:spPr>
-        <p:txBody>
-          <a:bodyPr wrap="square">
-            <a:spAutoFit/>
-          </a:bodyPr>
-          <a:lstStyle/>
-          <a:p>
-            <a:pPr algn="l"/>
-            <a:r>
-              <a:rPr sz="1000" b="0" i="0">
-                <a:solidFill>
-                  <a:srgbClr val="7F8C8D"/>
-                </a:solidFill>
-                <a:latin typeface="Calibri"/>
-              </a:rPr>
-              <a:t>Tools used and why</a:t>
-            </a:r>
-          </a:p>
-        </p:txBody>
-      </p:sp>
-      <p:sp>
-        <p:nvSpPr>
-          <p:cNvPr id="38" name="Rectangle 37"/>
+          <p:cNvPr id="30" name="Rectangle 29"/>
           <p:cNvSpPr/>
           <p:nvPr/>
         </p:nvSpPr>
         <p:spPr>
           <a:xfrm>
-            <a:off x="6400800" y="2414016"/>
-            <a:ext cx="384048" cy="347472"/>
+            <a:off x="347472" y="3703320"/>
+            <a:ext cx="347472" cy="347472"/>
           </a:xfrm>
           <a:prstGeom prst="rect">
             <a:avLst/>
@@ -15455,119 +15390,162 @@
       </p:sp>
       <p:sp>
         <p:nvSpPr>
-          <p:cNvPr id="39" name="TextBox 38"/>
-          <p:cNvSpPr txBox="1"/>
-          <p:nvPr/>
-        </p:nvSpPr>
-        <p:spPr>
-          <a:xfrm>
-            <a:off x="6400800" y="2414016"/>
-            <a:ext cx="384048" cy="347472"/>
-          </a:xfrm>
-          <a:prstGeom prst="rect">
-            <a:avLst/>
-          </a:prstGeom>
-          <a:noFill/>
-        </p:spPr>
-        <p:txBody>
-          <a:bodyPr wrap="square">
-            <a:spAutoFit/>
-          </a:bodyPr>
-          <a:lstStyle/>
-          <a:p>
-            <a:pPr algn="ctr"/>
-            <a:r>
-              <a:rPr sz="1200" b="1" i="0">
+          <p:cNvPr id="31" name="TextBox 30"/>
+          <p:cNvSpPr txBox="1"/>
+          <p:nvPr/>
+        </p:nvSpPr>
+        <p:spPr>
+          <a:xfrm>
+            <a:off x="347472" y="3703320"/>
+            <a:ext cx="347472" cy="347472"/>
+          </a:xfrm>
+          <a:prstGeom prst="rect">
+            <a:avLst/>
+          </a:prstGeom>
+          <a:noFill/>
+        </p:spPr>
+        <p:txBody>
+          <a:bodyPr wrap="square">
+            <a:spAutoFit/>
+          </a:bodyPr>
+          <a:lstStyle/>
+          <a:p>
+            <a:pPr algn="ctr"/>
+            <a:r>
+              <a:rPr sz="1100" b="1" i="0">
                 <a:solidFill>
                   <a:srgbClr val="0D1B2A"/>
                 </a:solidFill>
                 <a:latin typeface="Calibri"/>
               </a:rPr>
-              <a:t>08</a:t>
-            </a:r>
-          </a:p>
-        </p:txBody>
-      </p:sp>
-      <p:sp>
-        <p:nvSpPr>
-          <p:cNvPr id="40" name="TextBox 39"/>
-          <p:cNvSpPr txBox="1"/>
-          <p:nvPr/>
-        </p:nvSpPr>
-        <p:spPr>
-          <a:xfrm>
-            <a:off x="6858000" y="2414016"/>
-            <a:ext cx="2560320" cy="347472"/>
-          </a:xfrm>
-          <a:prstGeom prst="rect">
-            <a:avLst/>
-          </a:prstGeom>
-          <a:noFill/>
-        </p:spPr>
-        <p:txBody>
-          <a:bodyPr wrap="square">
-            <a:spAutoFit/>
-          </a:bodyPr>
-          <a:lstStyle/>
-          <a:p>
-            <a:pPr algn="l"/>
-            <a:r>
-              <a:rPr sz="1400" b="1" i="0">
+              <a:t>04</a:t>
+            </a:r>
+          </a:p>
+        </p:txBody>
+      </p:sp>
+      <p:sp>
+        <p:nvSpPr>
+          <p:cNvPr id="32" name="TextBox 31"/>
+          <p:cNvSpPr txBox="1"/>
+          <p:nvPr/>
+        </p:nvSpPr>
+        <p:spPr>
+          <a:xfrm>
+            <a:off x="777240" y="3648456"/>
+            <a:ext cx="3063240" cy="320040"/>
+          </a:xfrm>
+          <a:prstGeom prst="rect">
+            <a:avLst/>
+          </a:prstGeom>
+          <a:noFill/>
+        </p:spPr>
+        <p:txBody>
+          <a:bodyPr wrap="square">
+            <a:spAutoFit/>
+          </a:bodyPr>
+          <a:lstStyle/>
+          <a:p>
+            <a:pPr algn="l"/>
+            <a:r>
+              <a:rPr sz="1300" b="1" i="0">
                 <a:solidFill>
                   <a:srgbClr val="2C3E50"/>
                 </a:solidFill>
                 <a:latin typeface="Calibri"/>
               </a:rPr>
-              <a:t>Part 1 — Local POC</a:t>
-            </a:r>
-          </a:p>
-        </p:txBody>
-      </p:sp>
-      <p:sp>
-        <p:nvSpPr>
-          <p:cNvPr id="41" name="TextBox 40"/>
-          <p:cNvSpPr txBox="1"/>
-          <p:nvPr/>
-        </p:nvSpPr>
-        <p:spPr>
-          <a:xfrm>
-            <a:off x="6858000" y="2615184"/>
-            <a:ext cx="2560320" cy="256032"/>
-          </a:xfrm>
-          <a:prstGeom prst="rect">
-            <a:avLst/>
-          </a:prstGeom>
-          <a:noFill/>
-        </p:spPr>
-        <p:txBody>
-          <a:bodyPr wrap="square">
-            <a:spAutoFit/>
-          </a:bodyPr>
-          <a:lstStyle/>
-          <a:p>
-            <a:pPr algn="l"/>
-            <a:r>
-              <a:rPr sz="1000" b="0" i="0">
+              <a:t>Databricks Key Features</a:t>
+            </a:r>
+          </a:p>
+        </p:txBody>
+      </p:sp>
+      <p:sp>
+        <p:nvSpPr>
+          <p:cNvPr id="33" name="TextBox 32"/>
+          <p:cNvSpPr txBox="1"/>
+          <p:nvPr/>
+        </p:nvSpPr>
+        <p:spPr>
+          <a:xfrm>
+            <a:off x="777240" y="3941064"/>
+            <a:ext cx="3063240" cy="237744"/>
+          </a:xfrm>
+          <a:prstGeom prst="rect">
+            <a:avLst/>
+          </a:prstGeom>
+          <a:noFill/>
+        </p:spPr>
+        <p:txBody>
+          <a:bodyPr wrap="square">
+            <a:spAutoFit/>
+          </a:bodyPr>
+          <a:lstStyle/>
+          <a:p>
+            <a:pPr algn="l"/>
+            <a:r>
+              <a:rPr sz="1000" b="0" i="1">
                 <a:solidFill>
                   <a:srgbClr val="7F8C8D"/>
                 </a:solidFill>
                 <a:latin typeface="Calibri"/>
               </a:rPr>
-              <a:t>What we built, fully working</a:t>
-            </a:r>
-          </a:p>
-        </p:txBody>
-      </p:sp>
-      <p:sp>
-        <p:nvSpPr>
-          <p:cNvPr id="42" name="Rectangle 41"/>
+              <a:t>Delta Lake, Unity Catalog</a:t>
+            </a:r>
+          </a:p>
+        </p:txBody>
+      </p:sp>
+      <p:sp>
+        <p:nvSpPr>
+          <p:cNvPr id="34" name="Rectangle 33"/>
           <p:cNvSpPr/>
           <p:nvPr/>
         </p:nvSpPr>
         <p:spPr>
           <a:xfrm>
-            <a:off x="6400800" y="2889504"/>
-            <a:ext cx="384048" cy="347472"/>
+            <a:off x="274320" y="4270248"/>
+            <a:ext cx="3657600" cy="658368"/>
+          </a:xfrm>
+          <a:prstGeom prst="rect">
+            <a:avLst/>
+          </a:prstGeom>
+          <a:solidFill>
+            <a:srgbClr val="FFFFFF"/>
+          </a:solidFill>
+          <a:ln>
+            <a:noFill/>
+          </a:ln>
+        </p:spPr>
+        <p:style>
+          <a:lnRef idx="1">
+            <a:schemeClr val="accent1"/>
+          </a:lnRef>
+          <a:fillRef idx="3">
+            <a:schemeClr val="accent1"/>
+          </a:fillRef>
+          <a:effectRef idx="2">
+            <a:schemeClr val="accent1"/>
+          </a:effectRef>
+          <a:fontRef idx="minor">
+            <a:schemeClr val="lt1"/>
+          </a:fontRef>
+        </p:style>
+        <p:txBody>
+          <a:bodyPr rtlCol="0" anchor="ctr"/>
+          <a:lstStyle/>
+          <a:p>
+            <a:pPr algn="ctr"/>
+          </a:p>
+        </p:txBody>
+      </p:sp>
+      <p:sp>
+        <p:nvSpPr>
+          <p:cNvPr id="35" name="Rectangle 34"/>
+          <p:cNvSpPr/>
+          <p:nvPr/>
+        </p:nvSpPr>
+        <p:spPr>
+          <a:xfrm>
+            <a:off x="274320" y="4270248"/>
+            <a:ext cx="50800" cy="658368"/>
           </a:xfrm>
           <a:prstGeom prst="rect">
             <a:avLst/>
@@ -15603,119 +15581,14 @@
       </p:sp>
       <p:sp>
         <p:nvSpPr>
-          <p:cNvPr id="43" name="TextBox 42"/>
-          <p:cNvSpPr txBox="1"/>
-          <p:nvPr/>
-        </p:nvSpPr>
-        <p:spPr>
-          <a:xfrm>
-            <a:off x="6400800" y="2889504"/>
-            <a:ext cx="384048" cy="347472"/>
-          </a:xfrm>
-          <a:prstGeom prst="rect">
-            <a:avLst/>
-          </a:prstGeom>
-          <a:noFill/>
-        </p:spPr>
-        <p:txBody>
-          <a:bodyPr wrap="square">
-            <a:spAutoFit/>
-          </a:bodyPr>
-          <a:lstStyle/>
-          <a:p>
-            <a:pPr algn="ctr"/>
-            <a:r>
-              <a:rPr sz="1200" b="1" i="0">
-                <a:solidFill>
-                  <a:srgbClr val="0D1B2A"/>
-                </a:solidFill>
-                <a:latin typeface="Calibri"/>
-              </a:rPr>
-              <a:t>09</a:t>
-            </a:r>
-          </a:p>
-        </p:txBody>
-      </p:sp>
-      <p:sp>
-        <p:nvSpPr>
-          <p:cNvPr id="44" name="TextBox 43"/>
-          <p:cNvSpPr txBox="1"/>
-          <p:nvPr/>
-        </p:nvSpPr>
-        <p:spPr>
-          <a:xfrm>
-            <a:off x="6858000" y="2889504"/>
-            <a:ext cx="2560320" cy="347472"/>
-          </a:xfrm>
-          <a:prstGeom prst="rect">
-            <a:avLst/>
-          </a:prstGeom>
-          <a:noFill/>
-        </p:spPr>
-        <p:txBody>
-          <a:bodyPr wrap="square">
-            <a:spAutoFit/>
-          </a:bodyPr>
-          <a:lstStyle/>
-          <a:p>
-            <a:pPr algn="l"/>
-            <a:r>
-              <a:rPr sz="1400" b="1" i="0">
-                <a:solidFill>
-                  <a:srgbClr val="2C3E50"/>
-                </a:solidFill>
-                <a:latin typeface="Calibri"/>
-              </a:rPr>
-              <a:t>Part 2 — Azure Migration</a:t>
-            </a:r>
-          </a:p>
-        </p:txBody>
-      </p:sp>
-      <p:sp>
-        <p:nvSpPr>
-          <p:cNvPr id="45" name="TextBox 44"/>
-          <p:cNvSpPr txBox="1"/>
-          <p:nvPr/>
-        </p:nvSpPr>
-        <p:spPr>
-          <a:xfrm>
-            <a:off x="6858000" y="3090672"/>
-            <a:ext cx="2560320" cy="256032"/>
-          </a:xfrm>
-          <a:prstGeom prst="rect">
-            <a:avLst/>
-          </a:prstGeom>
-          <a:noFill/>
-        </p:spPr>
-        <p:txBody>
-          <a:bodyPr wrap="square">
-            <a:spAutoFit/>
-          </a:bodyPr>
-          <a:lstStyle/>
-          <a:p>
-            <a:pPr algn="l"/>
-            <a:r>
-              <a:rPr sz="1000" b="0" i="0">
-                <a:solidFill>
-                  <a:srgbClr val="7F8C8D"/>
-                </a:solidFill>
-                <a:latin typeface="Calibri"/>
-              </a:rPr>
-              <a:t>Current progress on cloud</a:t>
-            </a:r>
-          </a:p>
-        </p:txBody>
-      </p:sp>
-      <p:sp>
-        <p:nvSpPr>
-          <p:cNvPr id="46" name="Rectangle 45"/>
+          <p:cNvPr id="36" name="Rectangle 35"/>
           <p:cNvSpPr/>
           <p:nvPr/>
         </p:nvSpPr>
         <p:spPr>
           <a:xfrm>
-            <a:off x="6400800" y="3364992"/>
-            <a:ext cx="384048" cy="347472"/>
+            <a:off x="347472" y="4416552"/>
+            <a:ext cx="347472" cy="347472"/>
           </a:xfrm>
           <a:prstGeom prst="rect">
             <a:avLst/>
@@ -15751,119 +15624,162 @@
       </p:sp>
       <p:sp>
         <p:nvSpPr>
-          <p:cNvPr id="47" name="TextBox 46"/>
-          <p:cNvSpPr txBox="1"/>
-          <p:nvPr/>
-        </p:nvSpPr>
-        <p:spPr>
-          <a:xfrm>
-            <a:off x="6400800" y="3364992"/>
-            <a:ext cx="384048" cy="347472"/>
-          </a:xfrm>
-          <a:prstGeom prst="rect">
-            <a:avLst/>
-          </a:prstGeom>
-          <a:noFill/>
-        </p:spPr>
-        <p:txBody>
-          <a:bodyPr wrap="square">
-            <a:spAutoFit/>
-          </a:bodyPr>
-          <a:lstStyle/>
-          <a:p>
-            <a:pPr algn="ctr"/>
-            <a:r>
-              <a:rPr sz="1200" b="1" i="0">
+          <p:cNvPr id="37" name="TextBox 36"/>
+          <p:cNvSpPr txBox="1"/>
+          <p:nvPr/>
+        </p:nvSpPr>
+        <p:spPr>
+          <a:xfrm>
+            <a:off x="347472" y="4416552"/>
+            <a:ext cx="347472" cy="347472"/>
+          </a:xfrm>
+          <a:prstGeom prst="rect">
+            <a:avLst/>
+          </a:prstGeom>
+          <a:noFill/>
+        </p:spPr>
+        <p:txBody>
+          <a:bodyPr wrap="square">
+            <a:spAutoFit/>
+          </a:bodyPr>
+          <a:lstStyle/>
+          <a:p>
+            <a:pPr algn="ctr"/>
+            <a:r>
+              <a:rPr sz="1100" b="1" i="0">
                 <a:solidFill>
                   <a:srgbClr val="0D1B2A"/>
                 </a:solidFill>
                 <a:latin typeface="Calibri"/>
               </a:rPr>
-              <a:t>10</a:t>
-            </a:r>
-          </a:p>
-        </p:txBody>
-      </p:sp>
-      <p:sp>
-        <p:nvSpPr>
-          <p:cNvPr id="48" name="TextBox 47"/>
-          <p:cNvSpPr txBox="1"/>
-          <p:nvPr/>
-        </p:nvSpPr>
-        <p:spPr>
-          <a:xfrm>
-            <a:off x="6858000" y="3364992"/>
-            <a:ext cx="2560320" cy="347472"/>
-          </a:xfrm>
-          <a:prstGeom prst="rect">
-            <a:avLst/>
-          </a:prstGeom>
-          <a:noFill/>
-        </p:spPr>
-        <p:txBody>
-          <a:bodyPr wrap="square">
-            <a:spAutoFit/>
-          </a:bodyPr>
-          <a:lstStyle/>
-          <a:p>
-            <a:pPr algn="l"/>
-            <a:r>
-              <a:rPr sz="1400" b="1" i="0">
+              <a:t>05</a:t>
+            </a:r>
+          </a:p>
+        </p:txBody>
+      </p:sp>
+      <p:sp>
+        <p:nvSpPr>
+          <p:cNvPr id="38" name="TextBox 37"/>
+          <p:cNvSpPr txBox="1"/>
+          <p:nvPr/>
+        </p:nvSpPr>
+        <p:spPr>
+          <a:xfrm>
+            <a:off x="777240" y="4361688"/>
+            <a:ext cx="3063240" cy="320040"/>
+          </a:xfrm>
+          <a:prstGeom prst="rect">
+            <a:avLst/>
+          </a:prstGeom>
+          <a:noFill/>
+        </p:spPr>
+        <p:txBody>
+          <a:bodyPr wrap="square">
+            <a:spAutoFit/>
+          </a:bodyPr>
+          <a:lstStyle/>
+          <a:p>
+            <a:pPr algn="l"/>
+            <a:r>
+              <a:rPr sz="1300" b="1" i="0">
                 <a:solidFill>
                   <a:srgbClr val="2C3E50"/>
                 </a:solidFill>
                 <a:latin typeface="Calibri"/>
               </a:rPr>
-              <a:t>Key Achievements</a:t>
-            </a:r>
-          </a:p>
-        </p:txBody>
-      </p:sp>
-      <p:sp>
-        <p:nvSpPr>
-          <p:cNvPr id="49" name="TextBox 48"/>
-          <p:cNvSpPr txBox="1"/>
-          <p:nvPr/>
-        </p:nvSpPr>
-        <p:spPr>
-          <a:xfrm>
-            <a:off x="6858000" y="3566160"/>
-            <a:ext cx="2560320" cy="256032"/>
-          </a:xfrm>
-          <a:prstGeom prst="rect">
-            <a:avLst/>
-          </a:prstGeom>
-          <a:noFill/>
-        </p:spPr>
-        <p:txBody>
-          <a:bodyPr wrap="square">
-            <a:spAutoFit/>
-          </a:bodyPr>
-          <a:lstStyle/>
-          <a:p>
-            <a:pPr algn="l"/>
-            <a:r>
-              <a:rPr sz="1000" b="0" i="0">
+              <a:t>Why Azure Databricks?</a:t>
+            </a:r>
+          </a:p>
+        </p:txBody>
+      </p:sp>
+      <p:sp>
+        <p:nvSpPr>
+          <p:cNvPr id="39" name="TextBox 38"/>
+          <p:cNvSpPr txBox="1"/>
+          <p:nvPr/>
+        </p:nvSpPr>
+        <p:spPr>
+          <a:xfrm>
+            <a:off x="777240" y="4654296"/>
+            <a:ext cx="3063240" cy="237744"/>
+          </a:xfrm>
+          <a:prstGeom prst="rect">
+            <a:avLst/>
+          </a:prstGeom>
+          <a:noFill/>
+        </p:spPr>
+        <p:txBody>
+          <a:bodyPr wrap="square">
+            <a:spAutoFit/>
+          </a:bodyPr>
+          <a:lstStyle/>
+          <a:p>
+            <a:pPr algn="l"/>
+            <a:r>
+              <a:rPr sz="1000" b="0" i="1">
                 <a:solidFill>
                   <a:srgbClr val="7F8C8D"/>
                 </a:solidFill>
                 <a:latin typeface="Calibri"/>
               </a:rPr>
-              <a:t>Highlights and live features</a:t>
-            </a:r>
-          </a:p>
-        </p:txBody>
-      </p:sp>
-      <p:sp>
-        <p:nvSpPr>
-          <p:cNvPr id="50" name="Rectangle 49"/>
+              <a:t>Cost, integration, vs alternatives</a:t>
+            </a:r>
+          </a:p>
+        </p:txBody>
+      </p:sp>
+      <p:sp>
+        <p:nvSpPr>
+          <p:cNvPr id="40" name="Rectangle 39"/>
           <p:cNvSpPr/>
           <p:nvPr/>
         </p:nvSpPr>
         <p:spPr>
           <a:xfrm>
-            <a:off x="6400800" y="1463040"/>
-            <a:ext cx="384048" cy="347472"/>
+            <a:off x="4206240" y="1417320"/>
+            <a:ext cx="3657600" cy="658368"/>
+          </a:xfrm>
+          <a:prstGeom prst="rect">
+            <a:avLst/>
+          </a:prstGeom>
+          <a:solidFill>
+            <a:srgbClr val="FFFFFF"/>
+          </a:solidFill>
+          <a:ln>
+            <a:noFill/>
+          </a:ln>
+        </p:spPr>
+        <p:style>
+          <a:lnRef idx="1">
+            <a:schemeClr val="accent1"/>
+          </a:lnRef>
+          <a:fillRef idx="3">
+            <a:schemeClr val="accent1"/>
+          </a:fillRef>
+          <a:effectRef idx="2">
+            <a:schemeClr val="accent1"/>
+          </a:effectRef>
+          <a:fontRef idx="minor">
+            <a:schemeClr val="lt1"/>
+          </a:fontRef>
+        </p:style>
+        <p:txBody>
+          <a:bodyPr rtlCol="0" anchor="ctr"/>
+          <a:lstStyle/>
+          <a:p>
+            <a:pPr algn="ctr"/>
+          </a:p>
+        </p:txBody>
+      </p:sp>
+      <p:sp>
+        <p:nvSpPr>
+          <p:cNvPr id="41" name="Rectangle 40"/>
+          <p:cNvSpPr/>
+          <p:nvPr/>
+        </p:nvSpPr>
+        <p:spPr>
+          <a:xfrm>
+            <a:off x="4206240" y="1417320"/>
+            <a:ext cx="50800" cy="658368"/>
           </a:xfrm>
           <a:prstGeom prst="rect">
             <a:avLst/>
@@ -15899,119 +15815,14 @@
       </p:sp>
       <p:sp>
         <p:nvSpPr>
-          <p:cNvPr id="51" name="TextBox 50"/>
-          <p:cNvSpPr txBox="1"/>
-          <p:nvPr/>
-        </p:nvSpPr>
-        <p:spPr>
-          <a:xfrm>
-            <a:off x="6400800" y="1463040"/>
-            <a:ext cx="384048" cy="347472"/>
-          </a:xfrm>
-          <a:prstGeom prst="rect">
-            <a:avLst/>
-          </a:prstGeom>
-          <a:noFill/>
-        </p:spPr>
-        <p:txBody>
-          <a:bodyPr wrap="square">
-            <a:spAutoFit/>
-          </a:bodyPr>
-          <a:lstStyle/>
-          <a:p>
-            <a:pPr algn="ctr"/>
-            <a:r>
-              <a:rPr sz="1200" b="1" i="0">
-                <a:solidFill>
-                  <a:srgbClr val="0D1B2A"/>
-                </a:solidFill>
-                <a:latin typeface="Calibri"/>
-              </a:rPr>
-              <a:t>11</a:t>
-            </a:r>
-          </a:p>
-        </p:txBody>
-      </p:sp>
-      <p:sp>
-        <p:nvSpPr>
-          <p:cNvPr id="52" name="TextBox 51"/>
-          <p:cNvSpPr txBox="1"/>
-          <p:nvPr/>
-        </p:nvSpPr>
-        <p:spPr>
-          <a:xfrm>
-            <a:off x="6858000" y="1463040"/>
-            <a:ext cx="2560320" cy="347472"/>
-          </a:xfrm>
-          <a:prstGeom prst="rect">
-            <a:avLst/>
-          </a:prstGeom>
-          <a:noFill/>
-        </p:spPr>
-        <p:txBody>
-          <a:bodyPr wrap="square">
-            <a:spAutoFit/>
-          </a:bodyPr>
-          <a:lstStyle/>
-          <a:p>
-            <a:pPr algn="l"/>
-            <a:r>
-              <a:rPr sz="1400" b="1" i="0">
-                <a:solidFill>
-                  <a:srgbClr val="2C3E50"/>
-                </a:solidFill>
-                <a:latin typeface="Calibri"/>
-              </a:rPr>
-              <a:t>What's Next</a:t>
-            </a:r>
-          </a:p>
-        </p:txBody>
-      </p:sp>
-      <p:sp>
-        <p:nvSpPr>
-          <p:cNvPr id="53" name="TextBox 52"/>
-          <p:cNvSpPr txBox="1"/>
-          <p:nvPr/>
-        </p:nvSpPr>
-        <p:spPr>
-          <a:xfrm>
-            <a:off x="6858000" y="1664208"/>
-            <a:ext cx="2560320" cy="256032"/>
-          </a:xfrm>
-          <a:prstGeom prst="rect">
-            <a:avLst/>
-          </a:prstGeom>
-          <a:noFill/>
-        </p:spPr>
-        <p:txBody>
-          <a:bodyPr wrap="square">
-            <a:spAutoFit/>
-          </a:bodyPr>
-          <a:lstStyle/>
-          <a:p>
-            <a:pPr algn="l"/>
-            <a:r>
-              <a:rPr sz="1000" b="0" i="0">
-                <a:solidFill>
-                  <a:srgbClr val="7F8C8D"/>
-                </a:solidFill>
-                <a:latin typeface="Calibri"/>
-              </a:rPr>
-              <a:t>Remaining phases and plan</a:t>
-            </a:r>
-          </a:p>
-        </p:txBody>
-      </p:sp>
-      <p:sp>
-        <p:nvSpPr>
-          <p:cNvPr id="54" name="Rectangle 53"/>
+          <p:cNvPr id="42" name="Rectangle 41"/>
           <p:cNvSpPr/>
           <p:nvPr/>
         </p:nvSpPr>
         <p:spPr>
           <a:xfrm>
-            <a:off x="6400800" y="1938528"/>
-            <a:ext cx="384048" cy="347472"/>
+            <a:off x="4279392" y="1563624"/>
+            <a:ext cx="347472" cy="347472"/>
           </a:xfrm>
           <a:prstGeom prst="rect">
             <a:avLst/>
@@ -16047,119 +15858,162 @@
       </p:sp>
       <p:sp>
         <p:nvSpPr>
-          <p:cNvPr id="55" name="TextBox 54"/>
-          <p:cNvSpPr txBox="1"/>
-          <p:nvPr/>
-        </p:nvSpPr>
-        <p:spPr>
-          <a:xfrm>
-            <a:off x="6400800" y="1938528"/>
-            <a:ext cx="384048" cy="347472"/>
-          </a:xfrm>
-          <a:prstGeom prst="rect">
-            <a:avLst/>
-          </a:prstGeom>
-          <a:noFill/>
-        </p:spPr>
-        <p:txBody>
-          <a:bodyPr wrap="square">
-            <a:spAutoFit/>
-          </a:bodyPr>
-          <a:lstStyle/>
-          <a:p>
-            <a:pPr algn="ctr"/>
-            <a:r>
-              <a:rPr sz="1200" b="1" i="0">
+          <p:cNvPr id="43" name="TextBox 42"/>
+          <p:cNvSpPr txBox="1"/>
+          <p:nvPr/>
+        </p:nvSpPr>
+        <p:spPr>
+          <a:xfrm>
+            <a:off x="4279392" y="1563624"/>
+            <a:ext cx="347472" cy="347472"/>
+          </a:xfrm>
+          <a:prstGeom prst="rect">
+            <a:avLst/>
+          </a:prstGeom>
+          <a:noFill/>
+        </p:spPr>
+        <p:txBody>
+          <a:bodyPr wrap="square">
+            <a:spAutoFit/>
+          </a:bodyPr>
+          <a:lstStyle/>
+          <a:p>
+            <a:pPr algn="ctr"/>
+            <a:r>
+              <a:rPr sz="1100" b="1" i="0">
                 <a:solidFill>
                   <a:srgbClr val="0D1B2A"/>
                 </a:solidFill>
                 <a:latin typeface="Calibri"/>
               </a:rPr>
-              <a:t>12</a:t>
-            </a:r>
-          </a:p>
-        </p:txBody>
-      </p:sp>
-      <p:sp>
-        <p:nvSpPr>
-          <p:cNvPr id="56" name="TextBox 55"/>
-          <p:cNvSpPr txBox="1"/>
-          <p:nvPr/>
-        </p:nvSpPr>
-        <p:spPr>
-          <a:xfrm>
-            <a:off x="6858000" y="1938528"/>
-            <a:ext cx="2560320" cy="347472"/>
-          </a:xfrm>
-          <a:prstGeom prst="rect">
-            <a:avLst/>
-          </a:prstGeom>
-          <a:noFill/>
-        </p:spPr>
-        <p:txBody>
-          <a:bodyPr wrap="square">
-            <a:spAutoFit/>
-          </a:bodyPr>
-          <a:lstStyle/>
-          <a:p>
-            <a:pPr algn="l"/>
-            <a:r>
-              <a:rPr sz="1400" b="1" i="0">
+              <a:t>06</a:t>
+            </a:r>
+          </a:p>
+        </p:txBody>
+      </p:sp>
+      <p:sp>
+        <p:nvSpPr>
+          <p:cNvPr id="44" name="TextBox 43"/>
+          <p:cNvSpPr txBox="1"/>
+          <p:nvPr/>
+        </p:nvSpPr>
+        <p:spPr>
+          <a:xfrm>
+            <a:off x="4709160" y="1508760"/>
+            <a:ext cx="3063240" cy="320040"/>
+          </a:xfrm>
+          <a:prstGeom prst="rect">
+            <a:avLst/>
+          </a:prstGeom>
+          <a:noFill/>
+        </p:spPr>
+        <p:txBody>
+          <a:bodyPr wrap="square">
+            <a:spAutoFit/>
+          </a:bodyPr>
+          <a:lstStyle/>
+          <a:p>
+            <a:pPr algn="l"/>
+            <a:r>
+              <a:rPr sz="1300" b="1" i="0">
                 <a:solidFill>
                   <a:srgbClr val="2C3E50"/>
                 </a:solidFill>
                 <a:latin typeface="Calibri"/>
               </a:rPr>
-              <a:t>Business Value</a:t>
-            </a:r>
-          </a:p>
-        </p:txBody>
-      </p:sp>
-      <p:sp>
-        <p:nvSpPr>
-          <p:cNvPr id="57" name="TextBox 56"/>
-          <p:cNvSpPr txBox="1"/>
-          <p:nvPr/>
-        </p:nvSpPr>
-        <p:spPr>
-          <a:xfrm>
-            <a:off x="6858000" y="2139696"/>
-            <a:ext cx="2560320" cy="256032"/>
-          </a:xfrm>
-          <a:prstGeom prst="rect">
-            <a:avLst/>
-          </a:prstGeom>
-          <a:noFill/>
-        </p:spPr>
-        <p:txBody>
-          <a:bodyPr wrap="square">
-            <a:spAutoFit/>
-          </a:bodyPr>
-          <a:lstStyle/>
-          <a:p>
-            <a:pPr algn="l"/>
-            <a:r>
-              <a:rPr sz="1000" b="0" i="0">
+              <a:t>Solution Architecture</a:t>
+            </a:r>
+          </a:p>
+        </p:txBody>
+      </p:sp>
+      <p:sp>
+        <p:nvSpPr>
+          <p:cNvPr id="45" name="TextBox 44"/>
+          <p:cNvSpPr txBox="1"/>
+          <p:nvPr/>
+        </p:nvSpPr>
+        <p:spPr>
+          <a:xfrm>
+            <a:off x="4709160" y="1801368"/>
+            <a:ext cx="3063240" cy="237744"/>
+          </a:xfrm>
+          <a:prstGeom prst="rect">
+            <a:avLst/>
+          </a:prstGeom>
+          <a:noFill/>
+        </p:spPr>
+        <p:txBody>
+          <a:bodyPr wrap="square">
+            <a:spAutoFit/>
+          </a:bodyPr>
+          <a:lstStyle/>
+          <a:p>
+            <a:pPr algn="l"/>
+            <a:r>
+              <a:rPr sz="1000" b="0" i="1">
                 <a:solidFill>
                   <a:srgbClr val="7F8C8D"/>
                 </a:solidFill>
                 <a:latin typeface="Calibri"/>
               </a:rPr>
-              <a:t>What this delivers when complete</a:t>
-            </a:r>
-          </a:p>
-        </p:txBody>
-      </p:sp>
-      <p:sp>
-        <p:nvSpPr>
-          <p:cNvPr id="58" name="Rectangle 57"/>
+              <a:t>End-to-end design</a:t>
+            </a:r>
+          </a:p>
+        </p:txBody>
+      </p:sp>
+      <p:sp>
+        <p:nvSpPr>
+          <p:cNvPr id="46" name="Rectangle 45"/>
           <p:cNvSpPr/>
           <p:nvPr/>
         </p:nvSpPr>
         <p:spPr>
           <a:xfrm>
-            <a:off x="6400800" y="2414016"/>
-            <a:ext cx="384048" cy="347472"/>
+            <a:off x="4206240" y="2130552"/>
+            <a:ext cx="3657600" cy="658368"/>
+          </a:xfrm>
+          <a:prstGeom prst="rect">
+            <a:avLst/>
+          </a:prstGeom>
+          <a:solidFill>
+            <a:srgbClr val="FFFFFF"/>
+          </a:solidFill>
+          <a:ln>
+            <a:noFill/>
+          </a:ln>
+        </p:spPr>
+        <p:style>
+          <a:lnRef idx="1">
+            <a:schemeClr val="accent1"/>
+          </a:lnRef>
+          <a:fillRef idx="3">
+            <a:schemeClr val="accent1"/>
+          </a:fillRef>
+          <a:effectRef idx="2">
+            <a:schemeClr val="accent1"/>
+          </a:effectRef>
+          <a:fontRef idx="minor">
+            <a:schemeClr val="lt1"/>
+          </a:fontRef>
+        </p:style>
+        <p:txBody>
+          <a:bodyPr rtlCol="0" anchor="ctr"/>
+          <a:lstStyle/>
+          <a:p>
+            <a:pPr algn="ctr"/>
+          </a:p>
+        </p:txBody>
+      </p:sp>
+      <p:sp>
+        <p:nvSpPr>
+          <p:cNvPr id="47" name="Rectangle 46"/>
+          <p:cNvSpPr/>
+          <p:nvPr/>
+        </p:nvSpPr>
+        <p:spPr>
+          <a:xfrm>
+            <a:off x="4206240" y="2130552"/>
+            <a:ext cx="50800" cy="658368"/>
           </a:xfrm>
           <a:prstGeom prst="rect">
             <a:avLst/>
@@ -16195,34 +16049,1481 @@
       </p:sp>
       <p:sp>
         <p:nvSpPr>
-          <p:cNvPr id="59" name="TextBox 58"/>
-          <p:cNvSpPr txBox="1"/>
-          <p:nvPr/>
-        </p:nvSpPr>
-        <p:spPr>
-          <a:xfrm>
-            <a:off x="6400800" y="2414016"/>
-            <a:ext cx="384048" cy="347472"/>
-          </a:xfrm>
-          <a:prstGeom prst="rect">
-            <a:avLst/>
-          </a:prstGeom>
-          <a:noFill/>
-        </p:spPr>
-        <p:txBody>
-          <a:bodyPr wrap="square">
-            <a:spAutoFit/>
-          </a:bodyPr>
-          <a:lstStyle/>
-          <a:p>
-            <a:pPr algn="ctr"/>
-            <a:r>
-              <a:rPr sz="1200" b="1" i="0">
+          <p:cNvPr id="48" name="Rectangle 47"/>
+          <p:cNvSpPr/>
+          <p:nvPr/>
+        </p:nvSpPr>
+        <p:spPr>
+          <a:xfrm>
+            <a:off x="4279392" y="2276856"/>
+            <a:ext cx="347472" cy="347472"/>
+          </a:xfrm>
+          <a:prstGeom prst="rect">
+            <a:avLst/>
+          </a:prstGeom>
+          <a:solidFill>
+            <a:srgbClr val="00AEEF"/>
+          </a:solidFill>
+          <a:ln>
+            <a:noFill/>
+          </a:ln>
+        </p:spPr>
+        <p:style>
+          <a:lnRef idx="1">
+            <a:schemeClr val="accent1"/>
+          </a:lnRef>
+          <a:fillRef idx="3">
+            <a:schemeClr val="accent1"/>
+          </a:fillRef>
+          <a:effectRef idx="2">
+            <a:schemeClr val="accent1"/>
+          </a:effectRef>
+          <a:fontRef idx="minor">
+            <a:schemeClr val="lt1"/>
+          </a:fontRef>
+        </p:style>
+        <p:txBody>
+          <a:bodyPr rtlCol="0" anchor="ctr"/>
+          <a:lstStyle/>
+          <a:p>
+            <a:pPr algn="ctr"/>
+          </a:p>
+        </p:txBody>
+      </p:sp>
+      <p:sp>
+        <p:nvSpPr>
+          <p:cNvPr id="49" name="TextBox 48"/>
+          <p:cNvSpPr txBox="1"/>
+          <p:nvPr/>
+        </p:nvSpPr>
+        <p:spPr>
+          <a:xfrm>
+            <a:off x="4279392" y="2276856"/>
+            <a:ext cx="347472" cy="347472"/>
+          </a:xfrm>
+          <a:prstGeom prst="rect">
+            <a:avLst/>
+          </a:prstGeom>
+          <a:noFill/>
+        </p:spPr>
+        <p:txBody>
+          <a:bodyPr wrap="square">
+            <a:spAutoFit/>
+          </a:bodyPr>
+          <a:lstStyle/>
+          <a:p>
+            <a:pPr algn="ctr"/>
+            <a:r>
+              <a:rPr sz="1100" b="1" i="0">
                 <a:solidFill>
                   <a:srgbClr val="0D1B2A"/>
                 </a:solidFill>
                 <a:latin typeface="Calibri"/>
               </a:rPr>
+              <a:t>07</a:t>
+            </a:r>
+          </a:p>
+        </p:txBody>
+      </p:sp>
+      <p:sp>
+        <p:nvSpPr>
+          <p:cNvPr id="50" name="TextBox 49"/>
+          <p:cNvSpPr txBox="1"/>
+          <p:nvPr/>
+        </p:nvSpPr>
+        <p:spPr>
+          <a:xfrm>
+            <a:off x="4709160" y="2221992"/>
+            <a:ext cx="3063240" cy="320040"/>
+          </a:xfrm>
+          <a:prstGeom prst="rect">
+            <a:avLst/>
+          </a:prstGeom>
+          <a:noFill/>
+        </p:spPr>
+        <p:txBody>
+          <a:bodyPr wrap="square">
+            <a:spAutoFit/>
+          </a:bodyPr>
+          <a:lstStyle/>
+          <a:p>
+            <a:pPr algn="l"/>
+            <a:r>
+              <a:rPr sz="1300" b="1" i="0">
+                <a:solidFill>
+                  <a:srgbClr val="2C3E50"/>
+                </a:solidFill>
+                <a:latin typeface="Calibri"/>
+              </a:rPr>
+              <a:t>Technology Stack</a:t>
+            </a:r>
+          </a:p>
+        </p:txBody>
+      </p:sp>
+      <p:sp>
+        <p:nvSpPr>
+          <p:cNvPr id="51" name="TextBox 50"/>
+          <p:cNvSpPr txBox="1"/>
+          <p:nvPr/>
+        </p:nvSpPr>
+        <p:spPr>
+          <a:xfrm>
+            <a:off x="4709160" y="2514600"/>
+            <a:ext cx="3063240" cy="237744"/>
+          </a:xfrm>
+          <a:prstGeom prst="rect">
+            <a:avLst/>
+          </a:prstGeom>
+          <a:noFill/>
+        </p:spPr>
+        <p:txBody>
+          <a:bodyPr wrap="square">
+            <a:spAutoFit/>
+          </a:bodyPr>
+          <a:lstStyle/>
+          <a:p>
+            <a:pPr algn="l"/>
+            <a:r>
+              <a:rPr sz="1000" b="0" i="1">
+                <a:solidFill>
+                  <a:srgbClr val="7F8C8D"/>
+                </a:solidFill>
+                <a:latin typeface="Calibri"/>
+              </a:rPr>
+              <a:t>Tools used and why</a:t>
+            </a:r>
+          </a:p>
+        </p:txBody>
+      </p:sp>
+      <p:sp>
+        <p:nvSpPr>
+          <p:cNvPr id="52" name="Rectangle 51"/>
+          <p:cNvSpPr/>
+          <p:nvPr/>
+        </p:nvSpPr>
+        <p:spPr>
+          <a:xfrm>
+            <a:off x="4206240" y="2843784"/>
+            <a:ext cx="3657600" cy="658368"/>
+          </a:xfrm>
+          <a:prstGeom prst="rect">
+            <a:avLst/>
+          </a:prstGeom>
+          <a:solidFill>
+            <a:srgbClr val="FFFFFF"/>
+          </a:solidFill>
+          <a:ln>
+            <a:noFill/>
+          </a:ln>
+        </p:spPr>
+        <p:style>
+          <a:lnRef idx="1">
+            <a:schemeClr val="accent1"/>
+          </a:lnRef>
+          <a:fillRef idx="3">
+            <a:schemeClr val="accent1"/>
+          </a:fillRef>
+          <a:effectRef idx="2">
+            <a:schemeClr val="accent1"/>
+          </a:effectRef>
+          <a:fontRef idx="minor">
+            <a:schemeClr val="lt1"/>
+          </a:fontRef>
+        </p:style>
+        <p:txBody>
+          <a:bodyPr rtlCol="0" anchor="ctr"/>
+          <a:lstStyle/>
+          <a:p>
+            <a:pPr algn="ctr"/>
+          </a:p>
+        </p:txBody>
+      </p:sp>
+      <p:sp>
+        <p:nvSpPr>
+          <p:cNvPr id="53" name="Rectangle 52"/>
+          <p:cNvSpPr/>
+          <p:nvPr/>
+        </p:nvSpPr>
+        <p:spPr>
+          <a:xfrm>
+            <a:off x="4206240" y="2843784"/>
+            <a:ext cx="50800" cy="658368"/>
+          </a:xfrm>
+          <a:prstGeom prst="rect">
+            <a:avLst/>
+          </a:prstGeom>
+          <a:solidFill>
+            <a:srgbClr val="00AEEF"/>
+          </a:solidFill>
+          <a:ln>
+            <a:noFill/>
+          </a:ln>
+        </p:spPr>
+        <p:style>
+          <a:lnRef idx="1">
+            <a:schemeClr val="accent1"/>
+          </a:lnRef>
+          <a:fillRef idx="3">
+            <a:schemeClr val="accent1"/>
+          </a:fillRef>
+          <a:effectRef idx="2">
+            <a:schemeClr val="accent1"/>
+          </a:effectRef>
+          <a:fontRef idx="minor">
+            <a:schemeClr val="lt1"/>
+          </a:fontRef>
+        </p:style>
+        <p:txBody>
+          <a:bodyPr rtlCol="0" anchor="ctr"/>
+          <a:lstStyle/>
+          <a:p>
+            <a:pPr algn="ctr"/>
+          </a:p>
+        </p:txBody>
+      </p:sp>
+      <p:sp>
+        <p:nvSpPr>
+          <p:cNvPr id="54" name="Rectangle 53"/>
+          <p:cNvSpPr/>
+          <p:nvPr/>
+        </p:nvSpPr>
+        <p:spPr>
+          <a:xfrm>
+            <a:off x="4279392" y="2990088"/>
+            <a:ext cx="347472" cy="347472"/>
+          </a:xfrm>
+          <a:prstGeom prst="rect">
+            <a:avLst/>
+          </a:prstGeom>
+          <a:solidFill>
+            <a:srgbClr val="00AEEF"/>
+          </a:solidFill>
+          <a:ln>
+            <a:noFill/>
+          </a:ln>
+        </p:spPr>
+        <p:style>
+          <a:lnRef idx="1">
+            <a:schemeClr val="accent1"/>
+          </a:lnRef>
+          <a:fillRef idx="3">
+            <a:schemeClr val="accent1"/>
+          </a:fillRef>
+          <a:effectRef idx="2">
+            <a:schemeClr val="accent1"/>
+          </a:effectRef>
+          <a:fontRef idx="minor">
+            <a:schemeClr val="lt1"/>
+          </a:fontRef>
+        </p:style>
+        <p:txBody>
+          <a:bodyPr rtlCol="0" anchor="ctr"/>
+          <a:lstStyle/>
+          <a:p>
+            <a:pPr algn="ctr"/>
+          </a:p>
+        </p:txBody>
+      </p:sp>
+      <p:sp>
+        <p:nvSpPr>
+          <p:cNvPr id="55" name="TextBox 54"/>
+          <p:cNvSpPr txBox="1"/>
+          <p:nvPr/>
+        </p:nvSpPr>
+        <p:spPr>
+          <a:xfrm>
+            <a:off x="4279392" y="2990088"/>
+            <a:ext cx="347472" cy="347472"/>
+          </a:xfrm>
+          <a:prstGeom prst="rect">
+            <a:avLst/>
+          </a:prstGeom>
+          <a:noFill/>
+        </p:spPr>
+        <p:txBody>
+          <a:bodyPr wrap="square">
+            <a:spAutoFit/>
+          </a:bodyPr>
+          <a:lstStyle/>
+          <a:p>
+            <a:pPr algn="ctr"/>
+            <a:r>
+              <a:rPr sz="1100" b="1" i="0">
+                <a:solidFill>
+                  <a:srgbClr val="0D1B2A"/>
+                </a:solidFill>
+                <a:latin typeface="Calibri"/>
+              </a:rPr>
+              <a:t>08</a:t>
+            </a:r>
+          </a:p>
+        </p:txBody>
+      </p:sp>
+      <p:sp>
+        <p:nvSpPr>
+          <p:cNvPr id="56" name="TextBox 55"/>
+          <p:cNvSpPr txBox="1"/>
+          <p:nvPr/>
+        </p:nvSpPr>
+        <p:spPr>
+          <a:xfrm>
+            <a:off x="4709160" y="2935224"/>
+            <a:ext cx="3063240" cy="320040"/>
+          </a:xfrm>
+          <a:prstGeom prst="rect">
+            <a:avLst/>
+          </a:prstGeom>
+          <a:noFill/>
+        </p:spPr>
+        <p:txBody>
+          <a:bodyPr wrap="square">
+            <a:spAutoFit/>
+          </a:bodyPr>
+          <a:lstStyle/>
+          <a:p>
+            <a:pPr algn="l"/>
+            <a:r>
+              <a:rPr sz="1300" b="1" i="0">
+                <a:solidFill>
+                  <a:srgbClr val="2C3E50"/>
+                </a:solidFill>
+                <a:latin typeface="Calibri"/>
+              </a:rPr>
+              <a:t>Part 1 — Local POC</a:t>
+            </a:r>
+          </a:p>
+        </p:txBody>
+      </p:sp>
+      <p:sp>
+        <p:nvSpPr>
+          <p:cNvPr id="57" name="TextBox 56"/>
+          <p:cNvSpPr txBox="1"/>
+          <p:nvPr/>
+        </p:nvSpPr>
+        <p:spPr>
+          <a:xfrm>
+            <a:off x="4709160" y="3227832"/>
+            <a:ext cx="3063240" cy="237744"/>
+          </a:xfrm>
+          <a:prstGeom prst="rect">
+            <a:avLst/>
+          </a:prstGeom>
+          <a:noFill/>
+        </p:spPr>
+        <p:txBody>
+          <a:bodyPr wrap="square">
+            <a:spAutoFit/>
+          </a:bodyPr>
+          <a:lstStyle/>
+          <a:p>
+            <a:pPr algn="l"/>
+            <a:r>
+              <a:rPr sz="1000" b="0" i="1">
+                <a:solidFill>
+                  <a:srgbClr val="7F8C8D"/>
+                </a:solidFill>
+                <a:latin typeface="Calibri"/>
+              </a:rPr>
+              <a:t>What we built, fully working</a:t>
+            </a:r>
+          </a:p>
+        </p:txBody>
+      </p:sp>
+      <p:sp>
+        <p:nvSpPr>
+          <p:cNvPr id="58" name="Rectangle 57"/>
+          <p:cNvSpPr/>
+          <p:nvPr/>
+        </p:nvSpPr>
+        <p:spPr>
+          <a:xfrm>
+            <a:off x="4206240" y="3557016"/>
+            <a:ext cx="3657600" cy="658368"/>
+          </a:xfrm>
+          <a:prstGeom prst="rect">
+            <a:avLst/>
+          </a:prstGeom>
+          <a:solidFill>
+            <a:srgbClr val="FFFFFF"/>
+          </a:solidFill>
+          <a:ln>
+            <a:noFill/>
+          </a:ln>
+        </p:spPr>
+        <p:style>
+          <a:lnRef idx="1">
+            <a:schemeClr val="accent1"/>
+          </a:lnRef>
+          <a:fillRef idx="3">
+            <a:schemeClr val="accent1"/>
+          </a:fillRef>
+          <a:effectRef idx="2">
+            <a:schemeClr val="accent1"/>
+          </a:effectRef>
+          <a:fontRef idx="minor">
+            <a:schemeClr val="lt1"/>
+          </a:fontRef>
+        </p:style>
+        <p:txBody>
+          <a:bodyPr rtlCol="0" anchor="ctr"/>
+          <a:lstStyle/>
+          <a:p>
+            <a:pPr algn="ctr"/>
+          </a:p>
+        </p:txBody>
+      </p:sp>
+      <p:sp>
+        <p:nvSpPr>
+          <p:cNvPr id="59" name="Rectangle 58"/>
+          <p:cNvSpPr/>
+          <p:nvPr/>
+        </p:nvSpPr>
+        <p:spPr>
+          <a:xfrm>
+            <a:off x="4206240" y="3557016"/>
+            <a:ext cx="50800" cy="658368"/>
+          </a:xfrm>
+          <a:prstGeom prst="rect">
+            <a:avLst/>
+          </a:prstGeom>
+          <a:solidFill>
+            <a:srgbClr val="00AEEF"/>
+          </a:solidFill>
+          <a:ln>
+            <a:noFill/>
+          </a:ln>
+        </p:spPr>
+        <p:style>
+          <a:lnRef idx="1">
+            <a:schemeClr val="accent1"/>
+          </a:lnRef>
+          <a:fillRef idx="3">
+            <a:schemeClr val="accent1"/>
+          </a:fillRef>
+          <a:effectRef idx="2">
+            <a:schemeClr val="accent1"/>
+          </a:effectRef>
+          <a:fontRef idx="minor">
+            <a:schemeClr val="lt1"/>
+          </a:fontRef>
+        </p:style>
+        <p:txBody>
+          <a:bodyPr rtlCol="0" anchor="ctr"/>
+          <a:lstStyle/>
+          <a:p>
+            <a:pPr algn="ctr"/>
+          </a:p>
+        </p:txBody>
+      </p:sp>
+      <p:sp>
+        <p:nvSpPr>
+          <p:cNvPr id="60" name="Rectangle 59"/>
+          <p:cNvSpPr/>
+          <p:nvPr/>
+        </p:nvSpPr>
+        <p:spPr>
+          <a:xfrm>
+            <a:off x="4279392" y="3703320"/>
+            <a:ext cx="347472" cy="347472"/>
+          </a:xfrm>
+          <a:prstGeom prst="rect">
+            <a:avLst/>
+          </a:prstGeom>
+          <a:solidFill>
+            <a:srgbClr val="00AEEF"/>
+          </a:solidFill>
+          <a:ln>
+            <a:noFill/>
+          </a:ln>
+        </p:spPr>
+        <p:style>
+          <a:lnRef idx="1">
+            <a:schemeClr val="accent1"/>
+          </a:lnRef>
+          <a:fillRef idx="3">
+            <a:schemeClr val="accent1"/>
+          </a:fillRef>
+          <a:effectRef idx="2">
+            <a:schemeClr val="accent1"/>
+          </a:effectRef>
+          <a:fontRef idx="minor">
+            <a:schemeClr val="lt1"/>
+          </a:fontRef>
+        </p:style>
+        <p:txBody>
+          <a:bodyPr rtlCol="0" anchor="ctr"/>
+          <a:lstStyle/>
+          <a:p>
+            <a:pPr algn="ctr"/>
+          </a:p>
+        </p:txBody>
+      </p:sp>
+      <p:sp>
+        <p:nvSpPr>
+          <p:cNvPr id="61" name="TextBox 60"/>
+          <p:cNvSpPr txBox="1"/>
+          <p:nvPr/>
+        </p:nvSpPr>
+        <p:spPr>
+          <a:xfrm>
+            <a:off x="4279392" y="3703320"/>
+            <a:ext cx="347472" cy="347472"/>
+          </a:xfrm>
+          <a:prstGeom prst="rect">
+            <a:avLst/>
+          </a:prstGeom>
+          <a:noFill/>
+        </p:spPr>
+        <p:txBody>
+          <a:bodyPr wrap="square">
+            <a:spAutoFit/>
+          </a:bodyPr>
+          <a:lstStyle/>
+          <a:p>
+            <a:pPr algn="ctr"/>
+            <a:r>
+              <a:rPr sz="1100" b="1" i="0">
+                <a:solidFill>
+                  <a:srgbClr val="0D1B2A"/>
+                </a:solidFill>
+                <a:latin typeface="Calibri"/>
+              </a:rPr>
+              <a:t>09</a:t>
+            </a:r>
+          </a:p>
+        </p:txBody>
+      </p:sp>
+      <p:sp>
+        <p:nvSpPr>
+          <p:cNvPr id="62" name="TextBox 61"/>
+          <p:cNvSpPr txBox="1"/>
+          <p:nvPr/>
+        </p:nvSpPr>
+        <p:spPr>
+          <a:xfrm>
+            <a:off x="4709160" y="3648456"/>
+            <a:ext cx="3063240" cy="320040"/>
+          </a:xfrm>
+          <a:prstGeom prst="rect">
+            <a:avLst/>
+          </a:prstGeom>
+          <a:noFill/>
+        </p:spPr>
+        <p:txBody>
+          <a:bodyPr wrap="square">
+            <a:spAutoFit/>
+          </a:bodyPr>
+          <a:lstStyle/>
+          <a:p>
+            <a:pPr algn="l"/>
+            <a:r>
+              <a:rPr sz="1300" b="1" i="0">
+                <a:solidFill>
+                  <a:srgbClr val="2C3E50"/>
+                </a:solidFill>
+                <a:latin typeface="Calibri"/>
+              </a:rPr>
+              <a:t>Part 2 — Azure Migration</a:t>
+            </a:r>
+          </a:p>
+        </p:txBody>
+      </p:sp>
+      <p:sp>
+        <p:nvSpPr>
+          <p:cNvPr id="63" name="TextBox 62"/>
+          <p:cNvSpPr txBox="1"/>
+          <p:nvPr/>
+        </p:nvSpPr>
+        <p:spPr>
+          <a:xfrm>
+            <a:off x="4709160" y="3941064"/>
+            <a:ext cx="3063240" cy="237744"/>
+          </a:xfrm>
+          <a:prstGeom prst="rect">
+            <a:avLst/>
+          </a:prstGeom>
+          <a:noFill/>
+        </p:spPr>
+        <p:txBody>
+          <a:bodyPr wrap="square">
+            <a:spAutoFit/>
+          </a:bodyPr>
+          <a:lstStyle/>
+          <a:p>
+            <a:pPr algn="l"/>
+            <a:r>
+              <a:rPr sz="1000" b="0" i="1">
+                <a:solidFill>
+                  <a:srgbClr val="7F8C8D"/>
+                </a:solidFill>
+                <a:latin typeface="Calibri"/>
+              </a:rPr>
+              <a:t>Current cloud progress</a:t>
+            </a:r>
+          </a:p>
+        </p:txBody>
+      </p:sp>
+      <p:sp>
+        <p:nvSpPr>
+          <p:cNvPr id="64" name="Rectangle 63"/>
+          <p:cNvSpPr/>
+          <p:nvPr/>
+        </p:nvSpPr>
+        <p:spPr>
+          <a:xfrm>
+            <a:off x="4206240" y="4270248"/>
+            <a:ext cx="3657600" cy="658368"/>
+          </a:xfrm>
+          <a:prstGeom prst="rect">
+            <a:avLst/>
+          </a:prstGeom>
+          <a:solidFill>
+            <a:srgbClr val="FFFFFF"/>
+          </a:solidFill>
+          <a:ln>
+            <a:noFill/>
+          </a:ln>
+        </p:spPr>
+        <p:style>
+          <a:lnRef idx="1">
+            <a:schemeClr val="accent1"/>
+          </a:lnRef>
+          <a:fillRef idx="3">
+            <a:schemeClr val="accent1"/>
+          </a:fillRef>
+          <a:effectRef idx="2">
+            <a:schemeClr val="accent1"/>
+          </a:effectRef>
+          <a:fontRef idx="minor">
+            <a:schemeClr val="lt1"/>
+          </a:fontRef>
+        </p:style>
+        <p:txBody>
+          <a:bodyPr rtlCol="0" anchor="ctr"/>
+          <a:lstStyle/>
+          <a:p>
+            <a:pPr algn="ctr"/>
+          </a:p>
+        </p:txBody>
+      </p:sp>
+      <p:sp>
+        <p:nvSpPr>
+          <p:cNvPr id="65" name="Rectangle 64"/>
+          <p:cNvSpPr/>
+          <p:nvPr/>
+        </p:nvSpPr>
+        <p:spPr>
+          <a:xfrm>
+            <a:off x="4206240" y="4270248"/>
+            <a:ext cx="50800" cy="658368"/>
+          </a:xfrm>
+          <a:prstGeom prst="rect">
+            <a:avLst/>
+          </a:prstGeom>
+          <a:solidFill>
+            <a:srgbClr val="00AEEF"/>
+          </a:solidFill>
+          <a:ln>
+            <a:noFill/>
+          </a:ln>
+        </p:spPr>
+        <p:style>
+          <a:lnRef idx="1">
+            <a:schemeClr val="accent1"/>
+          </a:lnRef>
+          <a:fillRef idx="3">
+            <a:schemeClr val="accent1"/>
+          </a:fillRef>
+          <a:effectRef idx="2">
+            <a:schemeClr val="accent1"/>
+          </a:effectRef>
+          <a:fontRef idx="minor">
+            <a:schemeClr val="lt1"/>
+          </a:fontRef>
+        </p:style>
+        <p:txBody>
+          <a:bodyPr rtlCol="0" anchor="ctr"/>
+          <a:lstStyle/>
+          <a:p>
+            <a:pPr algn="ctr"/>
+          </a:p>
+        </p:txBody>
+      </p:sp>
+      <p:sp>
+        <p:nvSpPr>
+          <p:cNvPr id="66" name="Rectangle 65"/>
+          <p:cNvSpPr/>
+          <p:nvPr/>
+        </p:nvSpPr>
+        <p:spPr>
+          <a:xfrm>
+            <a:off x="4279392" y="4416552"/>
+            <a:ext cx="347472" cy="347472"/>
+          </a:xfrm>
+          <a:prstGeom prst="rect">
+            <a:avLst/>
+          </a:prstGeom>
+          <a:solidFill>
+            <a:srgbClr val="00AEEF"/>
+          </a:solidFill>
+          <a:ln>
+            <a:noFill/>
+          </a:ln>
+        </p:spPr>
+        <p:style>
+          <a:lnRef idx="1">
+            <a:schemeClr val="accent1"/>
+          </a:lnRef>
+          <a:fillRef idx="3">
+            <a:schemeClr val="accent1"/>
+          </a:fillRef>
+          <a:effectRef idx="2">
+            <a:schemeClr val="accent1"/>
+          </a:effectRef>
+          <a:fontRef idx="minor">
+            <a:schemeClr val="lt1"/>
+          </a:fontRef>
+        </p:style>
+        <p:txBody>
+          <a:bodyPr rtlCol="0" anchor="ctr"/>
+          <a:lstStyle/>
+          <a:p>
+            <a:pPr algn="ctr"/>
+          </a:p>
+        </p:txBody>
+      </p:sp>
+      <p:sp>
+        <p:nvSpPr>
+          <p:cNvPr id="67" name="TextBox 66"/>
+          <p:cNvSpPr txBox="1"/>
+          <p:nvPr/>
+        </p:nvSpPr>
+        <p:spPr>
+          <a:xfrm>
+            <a:off x="4279392" y="4416552"/>
+            <a:ext cx="347472" cy="347472"/>
+          </a:xfrm>
+          <a:prstGeom prst="rect">
+            <a:avLst/>
+          </a:prstGeom>
+          <a:noFill/>
+        </p:spPr>
+        <p:txBody>
+          <a:bodyPr wrap="square">
+            <a:spAutoFit/>
+          </a:bodyPr>
+          <a:lstStyle/>
+          <a:p>
+            <a:pPr algn="ctr"/>
+            <a:r>
+              <a:rPr sz="1100" b="1" i="0">
+                <a:solidFill>
+                  <a:srgbClr val="0D1B2A"/>
+                </a:solidFill>
+                <a:latin typeface="Calibri"/>
+              </a:rPr>
+              <a:t>10</a:t>
+            </a:r>
+          </a:p>
+        </p:txBody>
+      </p:sp>
+      <p:sp>
+        <p:nvSpPr>
+          <p:cNvPr id="68" name="TextBox 67"/>
+          <p:cNvSpPr txBox="1"/>
+          <p:nvPr/>
+        </p:nvSpPr>
+        <p:spPr>
+          <a:xfrm>
+            <a:off x="4709160" y="4361688"/>
+            <a:ext cx="3063240" cy="320040"/>
+          </a:xfrm>
+          <a:prstGeom prst="rect">
+            <a:avLst/>
+          </a:prstGeom>
+          <a:noFill/>
+        </p:spPr>
+        <p:txBody>
+          <a:bodyPr wrap="square">
+            <a:spAutoFit/>
+          </a:bodyPr>
+          <a:lstStyle/>
+          <a:p>
+            <a:pPr algn="l"/>
+            <a:r>
+              <a:rPr sz="1300" b="1" i="0">
+                <a:solidFill>
+                  <a:srgbClr val="2C3E50"/>
+                </a:solidFill>
+                <a:latin typeface="Calibri"/>
+              </a:rPr>
+              <a:t>Key Achievements</a:t>
+            </a:r>
+          </a:p>
+        </p:txBody>
+      </p:sp>
+      <p:sp>
+        <p:nvSpPr>
+          <p:cNvPr id="69" name="TextBox 68"/>
+          <p:cNvSpPr txBox="1"/>
+          <p:nvPr/>
+        </p:nvSpPr>
+        <p:spPr>
+          <a:xfrm>
+            <a:off x="4709160" y="4654296"/>
+            <a:ext cx="3063240" cy="237744"/>
+          </a:xfrm>
+          <a:prstGeom prst="rect">
+            <a:avLst/>
+          </a:prstGeom>
+          <a:noFill/>
+        </p:spPr>
+        <p:txBody>
+          <a:bodyPr wrap="square">
+            <a:spAutoFit/>
+          </a:bodyPr>
+          <a:lstStyle/>
+          <a:p>
+            <a:pPr algn="l"/>
+            <a:r>
+              <a:rPr sz="1000" b="0" i="1">
+                <a:solidFill>
+                  <a:srgbClr val="7F8C8D"/>
+                </a:solidFill>
+                <a:latin typeface="Calibri"/>
+              </a:rPr>
+              <a:t>Highlights and live features</a:t>
+            </a:r>
+          </a:p>
+        </p:txBody>
+      </p:sp>
+      <p:sp>
+        <p:nvSpPr>
+          <p:cNvPr id="70" name="Rectangle 69"/>
+          <p:cNvSpPr/>
+          <p:nvPr/>
+        </p:nvSpPr>
+        <p:spPr>
+          <a:xfrm>
+            <a:off x="8138160" y="1417320"/>
+            <a:ext cx="3657600" cy="658368"/>
+          </a:xfrm>
+          <a:prstGeom prst="rect">
+            <a:avLst/>
+          </a:prstGeom>
+          <a:solidFill>
+            <a:srgbClr val="FFFFFF"/>
+          </a:solidFill>
+          <a:ln>
+            <a:noFill/>
+          </a:ln>
+        </p:spPr>
+        <p:style>
+          <a:lnRef idx="1">
+            <a:schemeClr val="accent1"/>
+          </a:lnRef>
+          <a:fillRef idx="3">
+            <a:schemeClr val="accent1"/>
+          </a:fillRef>
+          <a:effectRef idx="2">
+            <a:schemeClr val="accent1"/>
+          </a:effectRef>
+          <a:fontRef idx="minor">
+            <a:schemeClr val="lt1"/>
+          </a:fontRef>
+        </p:style>
+        <p:txBody>
+          <a:bodyPr rtlCol="0" anchor="ctr"/>
+          <a:lstStyle/>
+          <a:p>
+            <a:pPr algn="ctr"/>
+          </a:p>
+        </p:txBody>
+      </p:sp>
+      <p:sp>
+        <p:nvSpPr>
+          <p:cNvPr id="71" name="Rectangle 70"/>
+          <p:cNvSpPr/>
+          <p:nvPr/>
+        </p:nvSpPr>
+        <p:spPr>
+          <a:xfrm>
+            <a:off x="8138160" y="1417320"/>
+            <a:ext cx="50800" cy="658368"/>
+          </a:xfrm>
+          <a:prstGeom prst="rect">
+            <a:avLst/>
+          </a:prstGeom>
+          <a:solidFill>
+            <a:srgbClr val="00AEEF"/>
+          </a:solidFill>
+          <a:ln>
+            <a:noFill/>
+          </a:ln>
+        </p:spPr>
+        <p:style>
+          <a:lnRef idx="1">
+            <a:schemeClr val="accent1"/>
+          </a:lnRef>
+          <a:fillRef idx="3">
+            <a:schemeClr val="accent1"/>
+          </a:fillRef>
+          <a:effectRef idx="2">
+            <a:schemeClr val="accent1"/>
+          </a:effectRef>
+          <a:fontRef idx="minor">
+            <a:schemeClr val="lt1"/>
+          </a:fontRef>
+        </p:style>
+        <p:txBody>
+          <a:bodyPr rtlCol="0" anchor="ctr"/>
+          <a:lstStyle/>
+          <a:p>
+            <a:pPr algn="ctr"/>
+          </a:p>
+        </p:txBody>
+      </p:sp>
+      <p:sp>
+        <p:nvSpPr>
+          <p:cNvPr id="72" name="Rectangle 71"/>
+          <p:cNvSpPr/>
+          <p:nvPr/>
+        </p:nvSpPr>
+        <p:spPr>
+          <a:xfrm>
+            <a:off x="8211312" y="1563624"/>
+            <a:ext cx="347472" cy="347472"/>
+          </a:xfrm>
+          <a:prstGeom prst="rect">
+            <a:avLst/>
+          </a:prstGeom>
+          <a:solidFill>
+            <a:srgbClr val="00AEEF"/>
+          </a:solidFill>
+          <a:ln>
+            <a:noFill/>
+          </a:ln>
+        </p:spPr>
+        <p:style>
+          <a:lnRef idx="1">
+            <a:schemeClr val="accent1"/>
+          </a:lnRef>
+          <a:fillRef idx="3">
+            <a:schemeClr val="accent1"/>
+          </a:fillRef>
+          <a:effectRef idx="2">
+            <a:schemeClr val="accent1"/>
+          </a:effectRef>
+          <a:fontRef idx="minor">
+            <a:schemeClr val="lt1"/>
+          </a:fontRef>
+        </p:style>
+        <p:txBody>
+          <a:bodyPr rtlCol="0" anchor="ctr"/>
+          <a:lstStyle/>
+          <a:p>
+            <a:pPr algn="ctr"/>
+          </a:p>
+        </p:txBody>
+      </p:sp>
+      <p:sp>
+        <p:nvSpPr>
+          <p:cNvPr id="73" name="TextBox 72"/>
+          <p:cNvSpPr txBox="1"/>
+          <p:nvPr/>
+        </p:nvSpPr>
+        <p:spPr>
+          <a:xfrm>
+            <a:off x="8211312" y="1563624"/>
+            <a:ext cx="347472" cy="347472"/>
+          </a:xfrm>
+          <a:prstGeom prst="rect">
+            <a:avLst/>
+          </a:prstGeom>
+          <a:noFill/>
+        </p:spPr>
+        <p:txBody>
+          <a:bodyPr wrap="square">
+            <a:spAutoFit/>
+          </a:bodyPr>
+          <a:lstStyle/>
+          <a:p>
+            <a:pPr algn="ctr"/>
+            <a:r>
+              <a:rPr sz="1100" b="1" i="0">
+                <a:solidFill>
+                  <a:srgbClr val="0D1B2A"/>
+                </a:solidFill>
+                <a:latin typeface="Calibri"/>
+              </a:rPr>
+              <a:t>11</a:t>
+            </a:r>
+          </a:p>
+        </p:txBody>
+      </p:sp>
+      <p:sp>
+        <p:nvSpPr>
+          <p:cNvPr id="74" name="TextBox 73"/>
+          <p:cNvSpPr txBox="1"/>
+          <p:nvPr/>
+        </p:nvSpPr>
+        <p:spPr>
+          <a:xfrm>
+            <a:off x="8641080" y="1508760"/>
+            <a:ext cx="3063240" cy="320040"/>
+          </a:xfrm>
+          <a:prstGeom prst="rect">
+            <a:avLst/>
+          </a:prstGeom>
+          <a:noFill/>
+        </p:spPr>
+        <p:txBody>
+          <a:bodyPr wrap="square">
+            <a:spAutoFit/>
+          </a:bodyPr>
+          <a:lstStyle/>
+          <a:p>
+            <a:pPr algn="l"/>
+            <a:r>
+              <a:rPr sz="1300" b="1" i="0">
+                <a:solidFill>
+                  <a:srgbClr val="2C3E50"/>
+                </a:solidFill>
+                <a:latin typeface="Calibri"/>
+              </a:rPr>
+              <a:t>What's Next</a:t>
+            </a:r>
+          </a:p>
+        </p:txBody>
+      </p:sp>
+      <p:sp>
+        <p:nvSpPr>
+          <p:cNvPr id="75" name="TextBox 74"/>
+          <p:cNvSpPr txBox="1"/>
+          <p:nvPr/>
+        </p:nvSpPr>
+        <p:spPr>
+          <a:xfrm>
+            <a:off x="8641080" y="1801368"/>
+            <a:ext cx="3063240" cy="237744"/>
+          </a:xfrm>
+          <a:prstGeom prst="rect">
+            <a:avLst/>
+          </a:prstGeom>
+          <a:noFill/>
+        </p:spPr>
+        <p:txBody>
+          <a:bodyPr wrap="square">
+            <a:spAutoFit/>
+          </a:bodyPr>
+          <a:lstStyle/>
+          <a:p>
+            <a:pPr algn="l"/>
+            <a:r>
+              <a:rPr sz="1000" b="0" i="1">
+                <a:solidFill>
+                  <a:srgbClr val="7F8C8D"/>
+                </a:solidFill>
+                <a:latin typeface="Calibri"/>
+              </a:rPr>
+              <a:t>Remaining phases and plan</a:t>
+            </a:r>
+          </a:p>
+        </p:txBody>
+      </p:sp>
+      <p:sp>
+        <p:nvSpPr>
+          <p:cNvPr id="76" name="Rectangle 75"/>
+          <p:cNvSpPr/>
+          <p:nvPr/>
+        </p:nvSpPr>
+        <p:spPr>
+          <a:xfrm>
+            <a:off x="8138160" y="2130552"/>
+            <a:ext cx="3657600" cy="658368"/>
+          </a:xfrm>
+          <a:prstGeom prst="rect">
+            <a:avLst/>
+          </a:prstGeom>
+          <a:solidFill>
+            <a:srgbClr val="FFFFFF"/>
+          </a:solidFill>
+          <a:ln>
+            <a:noFill/>
+          </a:ln>
+        </p:spPr>
+        <p:style>
+          <a:lnRef idx="1">
+            <a:schemeClr val="accent1"/>
+          </a:lnRef>
+          <a:fillRef idx="3">
+            <a:schemeClr val="accent1"/>
+          </a:fillRef>
+          <a:effectRef idx="2">
+            <a:schemeClr val="accent1"/>
+          </a:effectRef>
+          <a:fontRef idx="minor">
+            <a:schemeClr val="lt1"/>
+          </a:fontRef>
+        </p:style>
+        <p:txBody>
+          <a:bodyPr rtlCol="0" anchor="ctr"/>
+          <a:lstStyle/>
+          <a:p>
+            <a:pPr algn="ctr"/>
+          </a:p>
+        </p:txBody>
+      </p:sp>
+      <p:sp>
+        <p:nvSpPr>
+          <p:cNvPr id="77" name="Rectangle 76"/>
+          <p:cNvSpPr/>
+          <p:nvPr/>
+        </p:nvSpPr>
+        <p:spPr>
+          <a:xfrm>
+            <a:off x="8138160" y="2130552"/>
+            <a:ext cx="50800" cy="658368"/>
+          </a:xfrm>
+          <a:prstGeom prst="rect">
+            <a:avLst/>
+          </a:prstGeom>
+          <a:solidFill>
+            <a:srgbClr val="00AEEF"/>
+          </a:solidFill>
+          <a:ln>
+            <a:noFill/>
+          </a:ln>
+        </p:spPr>
+        <p:style>
+          <a:lnRef idx="1">
+            <a:schemeClr val="accent1"/>
+          </a:lnRef>
+          <a:fillRef idx="3">
+            <a:schemeClr val="accent1"/>
+          </a:fillRef>
+          <a:effectRef idx="2">
+            <a:schemeClr val="accent1"/>
+          </a:effectRef>
+          <a:fontRef idx="minor">
+            <a:schemeClr val="lt1"/>
+          </a:fontRef>
+        </p:style>
+        <p:txBody>
+          <a:bodyPr rtlCol="0" anchor="ctr"/>
+          <a:lstStyle/>
+          <a:p>
+            <a:pPr algn="ctr"/>
+          </a:p>
+        </p:txBody>
+      </p:sp>
+      <p:sp>
+        <p:nvSpPr>
+          <p:cNvPr id="78" name="Rectangle 77"/>
+          <p:cNvSpPr/>
+          <p:nvPr/>
+        </p:nvSpPr>
+        <p:spPr>
+          <a:xfrm>
+            <a:off x="8211312" y="2276856"/>
+            <a:ext cx="347472" cy="347472"/>
+          </a:xfrm>
+          <a:prstGeom prst="rect">
+            <a:avLst/>
+          </a:prstGeom>
+          <a:solidFill>
+            <a:srgbClr val="00AEEF"/>
+          </a:solidFill>
+          <a:ln>
+            <a:noFill/>
+          </a:ln>
+        </p:spPr>
+        <p:style>
+          <a:lnRef idx="1">
+            <a:schemeClr val="accent1"/>
+          </a:lnRef>
+          <a:fillRef idx="3">
+            <a:schemeClr val="accent1"/>
+          </a:fillRef>
+          <a:effectRef idx="2">
+            <a:schemeClr val="accent1"/>
+          </a:effectRef>
+          <a:fontRef idx="minor">
+            <a:schemeClr val="lt1"/>
+          </a:fontRef>
+        </p:style>
+        <p:txBody>
+          <a:bodyPr rtlCol="0" anchor="ctr"/>
+          <a:lstStyle/>
+          <a:p>
+            <a:pPr algn="ctr"/>
+          </a:p>
+        </p:txBody>
+      </p:sp>
+      <p:sp>
+        <p:nvSpPr>
+          <p:cNvPr id="79" name="TextBox 78"/>
+          <p:cNvSpPr txBox="1"/>
+          <p:nvPr/>
+        </p:nvSpPr>
+        <p:spPr>
+          <a:xfrm>
+            <a:off x="8211312" y="2276856"/>
+            <a:ext cx="347472" cy="347472"/>
+          </a:xfrm>
+          <a:prstGeom prst="rect">
+            <a:avLst/>
+          </a:prstGeom>
+          <a:noFill/>
+        </p:spPr>
+        <p:txBody>
+          <a:bodyPr wrap="square">
+            <a:spAutoFit/>
+          </a:bodyPr>
+          <a:lstStyle/>
+          <a:p>
+            <a:pPr algn="ctr"/>
+            <a:r>
+              <a:rPr sz="1100" b="1" i="0">
+                <a:solidFill>
+                  <a:srgbClr val="0D1B2A"/>
+                </a:solidFill>
+                <a:latin typeface="Calibri"/>
+              </a:rPr>
+              <a:t>12</a:t>
+            </a:r>
+          </a:p>
+        </p:txBody>
+      </p:sp>
+      <p:sp>
+        <p:nvSpPr>
+          <p:cNvPr id="80" name="TextBox 79"/>
+          <p:cNvSpPr txBox="1"/>
+          <p:nvPr/>
+        </p:nvSpPr>
+        <p:spPr>
+          <a:xfrm>
+            <a:off x="8641080" y="2221992"/>
+            <a:ext cx="3063240" cy="320040"/>
+          </a:xfrm>
+          <a:prstGeom prst="rect">
+            <a:avLst/>
+          </a:prstGeom>
+          <a:noFill/>
+        </p:spPr>
+        <p:txBody>
+          <a:bodyPr wrap="square">
+            <a:spAutoFit/>
+          </a:bodyPr>
+          <a:lstStyle/>
+          <a:p>
+            <a:pPr algn="l"/>
+            <a:r>
+              <a:rPr sz="1300" b="1" i="0">
+                <a:solidFill>
+                  <a:srgbClr val="2C3E50"/>
+                </a:solidFill>
+                <a:latin typeface="Calibri"/>
+              </a:rPr>
+              <a:t>Business Value</a:t>
+            </a:r>
+          </a:p>
+        </p:txBody>
+      </p:sp>
+      <p:sp>
+        <p:nvSpPr>
+          <p:cNvPr id="81" name="TextBox 80"/>
+          <p:cNvSpPr txBox="1"/>
+          <p:nvPr/>
+        </p:nvSpPr>
+        <p:spPr>
+          <a:xfrm>
+            <a:off x="8641080" y="2514600"/>
+            <a:ext cx="3063240" cy="237744"/>
+          </a:xfrm>
+          <a:prstGeom prst="rect">
+            <a:avLst/>
+          </a:prstGeom>
+          <a:noFill/>
+        </p:spPr>
+        <p:txBody>
+          <a:bodyPr wrap="square">
+            <a:spAutoFit/>
+          </a:bodyPr>
+          <a:lstStyle/>
+          <a:p>
+            <a:pPr algn="l"/>
+            <a:r>
+              <a:rPr sz="1000" b="0" i="1">
+                <a:solidFill>
+                  <a:srgbClr val="7F8C8D"/>
+                </a:solidFill>
+                <a:latin typeface="Calibri"/>
+              </a:rPr>
+              <a:t>What this delivers</a:t>
+            </a:r>
+          </a:p>
+        </p:txBody>
+      </p:sp>
+      <p:sp>
+        <p:nvSpPr>
+          <p:cNvPr id="82" name="Rectangle 81"/>
+          <p:cNvSpPr/>
+          <p:nvPr/>
+        </p:nvSpPr>
+        <p:spPr>
+          <a:xfrm>
+            <a:off x="8138160" y="2843784"/>
+            <a:ext cx="3657600" cy="658368"/>
+          </a:xfrm>
+          <a:prstGeom prst="rect">
+            <a:avLst/>
+          </a:prstGeom>
+          <a:solidFill>
+            <a:srgbClr val="FFFFFF"/>
+          </a:solidFill>
+          <a:ln>
+            <a:noFill/>
+          </a:ln>
+        </p:spPr>
+        <p:style>
+          <a:lnRef idx="1">
+            <a:schemeClr val="accent1"/>
+          </a:lnRef>
+          <a:fillRef idx="3">
+            <a:schemeClr val="accent1"/>
+          </a:fillRef>
+          <a:effectRef idx="2">
+            <a:schemeClr val="accent1"/>
+          </a:effectRef>
+          <a:fontRef idx="minor">
+            <a:schemeClr val="lt1"/>
+          </a:fontRef>
+        </p:style>
+        <p:txBody>
+          <a:bodyPr rtlCol="0" anchor="ctr"/>
+          <a:lstStyle/>
+          <a:p>
+            <a:pPr algn="ctr"/>
+          </a:p>
+        </p:txBody>
+      </p:sp>
+      <p:sp>
+        <p:nvSpPr>
+          <p:cNvPr id="83" name="Rectangle 82"/>
+          <p:cNvSpPr/>
+          <p:nvPr/>
+        </p:nvSpPr>
+        <p:spPr>
+          <a:xfrm>
+            <a:off x="8138160" y="2843784"/>
+            <a:ext cx="50800" cy="658368"/>
+          </a:xfrm>
+          <a:prstGeom prst="rect">
+            <a:avLst/>
+          </a:prstGeom>
+          <a:solidFill>
+            <a:srgbClr val="00AEEF"/>
+          </a:solidFill>
+          <a:ln>
+            <a:noFill/>
+          </a:ln>
+        </p:spPr>
+        <p:style>
+          <a:lnRef idx="1">
+            <a:schemeClr val="accent1"/>
+          </a:lnRef>
+          <a:fillRef idx="3">
+            <a:schemeClr val="accent1"/>
+          </a:fillRef>
+          <a:effectRef idx="2">
+            <a:schemeClr val="accent1"/>
+          </a:effectRef>
+          <a:fontRef idx="minor">
+            <a:schemeClr val="lt1"/>
+          </a:fontRef>
+        </p:style>
+        <p:txBody>
+          <a:bodyPr rtlCol="0" anchor="ctr"/>
+          <a:lstStyle/>
+          <a:p>
+            <a:pPr algn="ctr"/>
+          </a:p>
+        </p:txBody>
+      </p:sp>
+      <p:sp>
+        <p:nvSpPr>
+          <p:cNvPr id="84" name="Rectangle 83"/>
+          <p:cNvSpPr/>
+          <p:nvPr/>
+        </p:nvSpPr>
+        <p:spPr>
+          <a:xfrm>
+            <a:off x="8211312" y="2990088"/>
+            <a:ext cx="347472" cy="347472"/>
+          </a:xfrm>
+          <a:prstGeom prst="rect">
+            <a:avLst/>
+          </a:prstGeom>
+          <a:solidFill>
+            <a:srgbClr val="00AEEF"/>
+          </a:solidFill>
+          <a:ln>
+            <a:noFill/>
+          </a:ln>
+        </p:spPr>
+        <p:style>
+          <a:lnRef idx="1">
+            <a:schemeClr val="accent1"/>
+          </a:lnRef>
+          <a:fillRef idx="3">
+            <a:schemeClr val="accent1"/>
+          </a:fillRef>
+          <a:effectRef idx="2">
+            <a:schemeClr val="accent1"/>
+          </a:effectRef>
+          <a:fontRef idx="minor">
+            <a:schemeClr val="lt1"/>
+          </a:fontRef>
+        </p:style>
+        <p:txBody>
+          <a:bodyPr rtlCol="0" anchor="ctr"/>
+          <a:lstStyle/>
+          <a:p>
+            <a:pPr algn="ctr"/>
+          </a:p>
+        </p:txBody>
+      </p:sp>
+      <p:sp>
+        <p:nvSpPr>
+          <p:cNvPr id="85" name="TextBox 84"/>
+          <p:cNvSpPr txBox="1"/>
+          <p:nvPr/>
+        </p:nvSpPr>
+        <p:spPr>
+          <a:xfrm>
+            <a:off x="8211312" y="2990088"/>
+            <a:ext cx="347472" cy="347472"/>
+          </a:xfrm>
+          <a:prstGeom prst="rect">
+            <a:avLst/>
+          </a:prstGeom>
+          <a:noFill/>
+        </p:spPr>
+        <p:txBody>
+          <a:bodyPr wrap="square">
+            <a:spAutoFit/>
+          </a:bodyPr>
+          <a:lstStyle/>
+          <a:p>
+            <a:pPr algn="ctr"/>
+            <a:r>
+              <a:rPr sz="1100" b="1" i="0">
+                <a:solidFill>
+                  <a:srgbClr val="0D1B2A"/>
+                </a:solidFill>
+                <a:latin typeface="Calibri"/>
+              </a:rPr>
               <a:t>13</a:t>
             </a:r>
           </a:p>
@@ -16230,64 +17531,64 @@
       </p:sp>
       <p:sp>
         <p:nvSpPr>
-          <p:cNvPr id="60" name="TextBox 59"/>
-          <p:cNvSpPr txBox="1"/>
-          <p:nvPr/>
-        </p:nvSpPr>
-        <p:spPr>
-          <a:xfrm>
-            <a:off x="6858000" y="2414016"/>
-            <a:ext cx="2560320" cy="347472"/>
-          </a:xfrm>
-          <a:prstGeom prst="rect">
-            <a:avLst/>
-          </a:prstGeom>
-          <a:noFill/>
-        </p:spPr>
-        <p:txBody>
-          <a:bodyPr wrap="square">
-            <a:spAutoFit/>
-          </a:bodyPr>
-          <a:lstStyle/>
-          <a:p>
-            <a:pPr algn="l"/>
-            <a:r>
-              <a:rPr sz="1400" b="1" i="0">
+          <p:cNvPr id="86" name="TextBox 85"/>
+          <p:cNvSpPr txBox="1"/>
+          <p:nvPr/>
+        </p:nvSpPr>
+        <p:spPr>
+          <a:xfrm>
+            <a:off x="8641080" y="2935224"/>
+            <a:ext cx="3063240" cy="320040"/>
+          </a:xfrm>
+          <a:prstGeom prst="rect">
+            <a:avLst/>
+          </a:prstGeom>
+          <a:noFill/>
+        </p:spPr>
+        <p:txBody>
+          <a:bodyPr wrap="square">
+            <a:spAutoFit/>
+          </a:bodyPr>
+          <a:lstStyle/>
+          <a:p>
+            <a:pPr algn="l"/>
+            <a:r>
+              <a:rPr sz="1300" b="1" i="0">
                 <a:solidFill>
                   <a:srgbClr val="2C3E50"/>
                 </a:solidFill>
                 <a:latin typeface="Calibri"/>
               </a:rPr>
-              <a:t>Q&amp;A</a:t>
-            </a:r>
-          </a:p>
-        </p:txBody>
-      </p:sp>
-      <p:sp>
-        <p:nvSpPr>
-          <p:cNvPr id="61" name="TextBox 60"/>
-          <p:cNvSpPr txBox="1"/>
-          <p:nvPr/>
-        </p:nvSpPr>
-        <p:spPr>
-          <a:xfrm>
-            <a:off x="6858000" y="2615184"/>
-            <a:ext cx="2560320" cy="256032"/>
-          </a:xfrm>
-          <a:prstGeom prst="rect">
-            <a:avLst/>
-          </a:prstGeom>
-          <a:noFill/>
-        </p:spPr>
-        <p:txBody>
-          <a:bodyPr wrap="square">
-            <a:spAutoFit/>
-          </a:bodyPr>
-          <a:lstStyle/>
-          <a:p>
-            <a:pPr algn="l"/>
-            <a:r>
-              <a:rPr sz="1000" b="0" i="0">
+              <a:t>Q &amp; A</a:t>
+            </a:r>
+          </a:p>
+        </p:txBody>
+      </p:sp>
+      <p:sp>
+        <p:nvSpPr>
+          <p:cNvPr id="87" name="TextBox 86"/>
+          <p:cNvSpPr txBox="1"/>
+          <p:nvPr/>
+        </p:nvSpPr>
+        <p:spPr>
+          <a:xfrm>
+            <a:off x="8641080" y="3227832"/>
+            <a:ext cx="3063240" cy="237744"/>
+          </a:xfrm>
+          <a:prstGeom prst="rect">
+            <a:avLst/>
+          </a:prstGeom>
+          <a:noFill/>
+        </p:spPr>
+        <p:txBody>
+          <a:bodyPr wrap="square">
+            <a:spAutoFit/>
+          </a:bodyPr>
+          <a:lstStyle/>
+          <a:p>
+            <a:pPr algn="l"/>
+            <a:r>
+              <a:rPr sz="1000" b="0" i="1">
                 <a:solidFill>
                   <a:srgbClr val="7F8C8D"/>
                 </a:solidFill>
@@ -16803,7 +18104,7 @@
                 </a:solidFill>
                 <a:latin typeface="Calibri"/>
               </a:rPr>
-              <a:t>    Time Series — 168,000 smart meter readings</a:t>
+              <a:t>    Time Series — 168,000 meter readings (CSV file drops)</a:t>
             </a:r>
           </a:p>
           <a:p>
@@ -16815,7 +18116,7 @@
                 </a:solidFill>
                 <a:latin typeface="Calibri"/>
               </a:rPr>
-              <a:t>    Snapshot   — 14,000 network asset records (SQL)</a:t>
+              <a:t>    Snapshot   — 14,000 network asset records (SQLite DB)</a:t>
             </a:r>
           </a:p>
           <a:p>
@@ -16827,7 +18128,7 @@
                 </a:solidFill>
                 <a:latin typeface="Calibri"/>
               </a:rPr>
-              <a:t>    File Data  — 84,000 demand forecast records</a:t>
+              <a:t>    File Data  — 84,000 demand forecast records (Parquet)</a:t>
             </a:r>
           </a:p>
           <a:p>
@@ -25337,7 +26638,7 @@
                 <a:latin typeface="Calibri"/>
               </a:rPr>
               <a:t>• Smart Meters
-(Parquet)</a:t>
+(CSV)</a:t>
             </a:r>
           </a:p>
         </p:txBody>
@@ -25373,7 +26674,7 @@
                 <a:latin typeface="Calibri"/>
               </a:rPr>
               <a:t>• Network Assets
-(SQL/SQLite)</a:t>
+(SQLite DB)</a:t>
             </a:r>
           </a:p>
         </p:txBody>
@@ -28171,7 +29472,7 @@
                 </a:solidFill>
                 <a:latin typeface="Calibri"/>
               </a:rPr>
-              <a:t>AI reasoning + tool use to control pipeline</a:t>
+              <a:t>AI reasoning + tool use — 7 pipeline control tools</a:t>
             </a:r>
           </a:p>
         </p:txBody>
@@ -28545,7 +29846,7 @@
                 </a:solidFill>
                 <a:latin typeface="Calibri"/>
               </a:rPr>
-              <a:t>Snapshot data source — same JDBC pattern both envs</a:t>
+              <a:t>Snapshot source — same JDBC pattern both environments</a:t>
             </a:r>
           </a:p>
         </p:txBody>
@@ -28580,7 +29881,7 @@
                 </a:solidFill>
                 <a:latin typeface="Calibri"/>
               </a:rPr>
-              <a:t>Power BI Desktop</a:t>
+              <a:t>GitHub Actions CI/CD</a:t>
             </a:r>
           </a:p>
         </p:txBody>
@@ -28615,7 +29916,7 @@
                 </a:solidFill>
                 <a:latin typeface="Calibri"/>
               </a:rPr>
-              <a:t>Gold table visualisation, connects to Parquet/Delta</a:t>
+              <a:t>Syntax + secrets check on push, auto-deploy notebooks</a:t>
             </a:r>
           </a:p>
         </p:txBody>
@@ -28650,7 +29951,7 @@
                 </a:solidFill>
                 <a:latin typeface="Calibri"/>
               </a:rPr>
-              <a:t>Python-pptx / python-docx</a:t>
+              <a:t>Nightly Build (Task Scheduler)</a:t>
             </a:r>
           </a:p>
         </p:txBody>
@@ -28685,7 +29986,7 @@
                 </a:solidFill>
                 <a:latin typeface="Calibri"/>
               </a:rPr>
-              <a:t>Auto-generated documentation and presentations</a:t>
+              <a:t>2 AM pipeline run + WhatsApp result notification</a:t>
             </a:r>
           </a:p>
         </p:txBody>
